--- a/03-composition-references/slides-2-reference.pptx
+++ b/03-composition-references/slides-2-reference.pptx
@@ -5,7 +5,7 @@
     <p:sldMasterId id="2147483648" r:id="rId1"/>
   </p:sldMasterIdLst>
   <p:notesMasterIdLst>
-    <p:notesMasterId r:id="rId18"/>
+    <p:notesMasterId r:id="rId19"/>
   </p:notesMasterIdLst>
   <p:sldIdLst>
     <p:sldId id="256" r:id="rId2"/>
@@ -16,14 +16,15 @@
     <p:sldId id="261" r:id="rId7"/>
     <p:sldId id="262" r:id="rId8"/>
     <p:sldId id="263" r:id="rId9"/>
-    <p:sldId id="264" r:id="rId10"/>
-    <p:sldId id="265" r:id="rId11"/>
-    <p:sldId id="266" r:id="rId12"/>
-    <p:sldId id="267" r:id="rId13"/>
-    <p:sldId id="268" r:id="rId14"/>
-    <p:sldId id="269" r:id="rId15"/>
-    <p:sldId id="270" r:id="rId16"/>
-    <p:sldId id="271" r:id="rId17"/>
+    <p:sldId id="272" r:id="rId10"/>
+    <p:sldId id="264" r:id="rId11"/>
+    <p:sldId id="265" r:id="rId12"/>
+    <p:sldId id="266" r:id="rId13"/>
+    <p:sldId id="267" r:id="rId14"/>
+    <p:sldId id="268" r:id="rId15"/>
+    <p:sldId id="269" r:id="rId16"/>
+    <p:sldId id="270" r:id="rId17"/>
+    <p:sldId id="271" r:id="rId18"/>
   </p:sldIdLst>
   <p:sldSz cx="9144000" cy="6858000" type="screen4x3"/>
   <p:notesSz cx="7099300" cy="10234613"/>
@@ -122,6 +123,11 @@
       </a:defRPr>
     </a:lvl9pPr>
   </p:defaultTextStyle>
+  <p:extLst>
+    <p:ext uri="{EFAFB233-063F-42B5-8137-9DF3F51BA10A}">
+      <p15:sldGuideLst xmlns:p15="http://schemas.microsoft.com/office/powerpoint/2012/main"/>
+    </p:ext>
+  </p:extLst>
 </p:presentation>
 </file>
 
@@ -592,8 +598,8 @@
         </p:nvSpPr>
         <p:spPr>
           <a:xfrm>
-            <a:off x="990720" y="768240"/>
-            <a:ext cx="5117760" cy="3838320"/>
+            <a:off x="990600" y="768350"/>
+            <a:ext cx="5118100" cy="3838575"/>
           </a:xfrm>
           <a:prstGeom prst="rect">
             <a:avLst/>
@@ -757,8 +763,8 @@
         </p:nvSpPr>
         <p:spPr>
           <a:xfrm>
-            <a:off x="990720" y="768240"/>
-            <a:ext cx="5117760" cy="3838320"/>
+            <a:off x="990600" y="768350"/>
+            <a:ext cx="5118100" cy="3838575"/>
           </a:xfrm>
           <a:prstGeom prst="rect">
             <a:avLst/>
@@ -872,7 +878,7 @@
                 <a:latin typeface="Times New Roman"/>
                 <a:ea typeface="+mn-ea"/>
               </a:rPr>
-              <a:t>14</a:t>
+              <a:t>15</a:t>
             </a:fld>
             <a:endParaRPr lang="en-US" sz="1300" b="0" u="none" strike="noStrike">
               <a:solidFill>
@@ -1221,7 +1227,7 @@
                 <a:uFillTx/>
                 <a:latin typeface="Arial"/>
               </a:rPr>
-              <a:t>2026-03-29</a:t>
+              <a:t>2026-03-30</a:t>
             </a:fld>
             <a:endParaRPr lang="en-US" sz="2400" b="0" u="none" strike="noStrike">
               <a:solidFill>
@@ -2154,7 +2160,7 @@
                 <a:uFillTx/>
                 <a:latin typeface="Arial"/>
               </a:rPr>
-              <a:t>2026-03-29</a:t>
+              <a:t>2026-03-30</a:t>
             </a:fld>
             <a:endParaRPr lang="en-US" sz="2400" b="0" u="none" strike="noStrike">
               <a:solidFill>
@@ -3859,6 +3865,859 @@
       </p:grpSpPr>
       <p:sp>
         <p:nvSpPr>
+          <p:cNvPr id="60" name="PlaceHolder 1"/>
+          <p:cNvSpPr>
+            <a:spLocks noGrp="1"/>
+          </p:cNvSpPr>
+          <p:nvPr>
+            <p:ph type="title"/>
+          </p:nvPr>
+        </p:nvSpPr>
+        <p:spPr>
+          <a:xfrm>
+            <a:off x="304920" y="274680"/>
+            <a:ext cx="8534160" cy="715680"/>
+          </a:xfrm>
+          <a:prstGeom prst="rect">
+            <a:avLst/>
+          </a:prstGeom>
+          <a:noFill/>
+          <a:ln w="0">
+            <a:noFill/>
+          </a:ln>
+        </p:spPr>
+        <p:txBody>
+          <a:bodyPr lIns="90000" tIns="45000" rIns="90000" bIns="91440" anchor="b">
+            <a:normAutofit/>
+          </a:bodyPr>
+          <a:lstStyle/>
+          <a:p>
+            <a:pPr indent="0">
+              <a:lnSpc>
+                <a:spcPct val="100000"/>
+              </a:lnSpc>
+              <a:buNone/>
+            </a:pPr>
+            <a:r>
+              <a:rPr lang="en-US" sz="3200" b="0" u="none" strike="noStrike">
+                <a:solidFill>
+                  <a:srgbClr val="696464"/>
+                </a:solidFill>
+                <a:effectLst/>
+                <a:uFillTx/>
+                <a:latin typeface="Arial"/>
+              </a:rPr>
+              <a:t>Passing arguments by const reference</a:t>
+            </a:r>
+            <a:endParaRPr lang="en-US" sz="3200" b="0" u="none" strike="noStrike">
+              <a:solidFill>
+                <a:srgbClr val="000000"/>
+              </a:solidFill>
+              <a:effectLst/>
+              <a:uFillTx/>
+              <a:latin typeface="Arial"/>
+            </a:endParaRPr>
+          </a:p>
+        </p:txBody>
+      </p:sp>
+      <p:sp>
+        <p:nvSpPr>
+          <p:cNvPr id="61" name="PlaceHolder 2"/>
+          <p:cNvSpPr>
+            <a:spLocks noGrp="1"/>
+          </p:cNvSpPr>
+          <p:nvPr>
+            <p:ph type="sldNum" idx="18"/>
+          </p:nvPr>
+        </p:nvSpPr>
+        <p:spPr>
+          <a:xfrm>
+            <a:off x="0" y="6553080"/>
+            <a:ext cx="304560" cy="304560"/>
+          </a:xfrm>
+          <a:prstGeom prst="rect">
+            <a:avLst/>
+          </a:prstGeom>
+          <a:noFill/>
+          <a:ln w="0">
+            <a:noFill/>
+          </a:ln>
+        </p:spPr>
+        <p:txBody>
+          <a:bodyPr lIns="0" tIns="0" rIns="0" bIns="0" anchor="ctr" anchorCtr="1">
+            <a:noAutofit/>
+          </a:bodyPr>
+          <a:lstStyle>
+            <a:lvl1pPr indent="0" algn="ctr">
+              <a:lnSpc>
+                <a:spcPct val="100000"/>
+              </a:lnSpc>
+              <a:buNone/>
+              <a:defRPr lang="en-US" sz="1400" b="0" u="none" strike="noStrike">
+                <a:solidFill>
+                  <a:srgbClr val="FFFFFF"/>
+                </a:solidFill>
+                <a:effectLst/>
+                <a:uFillTx/>
+                <a:latin typeface="Arial"/>
+              </a:defRPr>
+            </a:lvl1pPr>
+          </a:lstStyle>
+          <a:p>
+            <a:pPr indent="0" algn="ctr">
+              <a:lnSpc>
+                <a:spcPct val="100000"/>
+              </a:lnSpc>
+              <a:buNone/>
+            </a:pPr>
+            <a:fld id="{37AE278F-E1E8-42CB-9FA7-C266316A32AA}" type="slidenum">
+              <a:rPr lang="en-US" sz="1400" b="0" u="none" strike="noStrike">
+                <a:solidFill>
+                  <a:srgbClr val="FFFFFF"/>
+                </a:solidFill>
+                <a:effectLst/>
+                <a:uFillTx/>
+                <a:latin typeface="Arial"/>
+              </a:rPr>
+              <a:t>10</a:t>
+            </a:fld>
+            <a:endParaRPr lang="en-US" sz="1400" b="0" u="none" strike="noStrike">
+              <a:solidFill>
+                <a:srgbClr val="FFFFFF"/>
+              </a:solidFill>
+              <a:effectLst/>
+              <a:uFillTx/>
+              <a:latin typeface="Times New Roman"/>
+            </a:endParaRPr>
+          </a:p>
+        </p:txBody>
+      </p:sp>
+      <p:sp>
+        <p:nvSpPr>
+          <p:cNvPr id="62" name="PlaceHolder 3"/>
+          <p:cNvSpPr>
+            <a:spLocks noGrp="1"/>
+          </p:cNvSpPr>
+          <p:nvPr>
+            <p:ph/>
+          </p:nvPr>
+        </p:nvSpPr>
+        <p:spPr>
+          <a:xfrm>
+            <a:off x="304920" y="1143000"/>
+            <a:ext cx="8534160" cy="5714640"/>
+          </a:xfrm>
+          <a:prstGeom prst="rect">
+            <a:avLst/>
+          </a:prstGeom>
+          <a:noFill/>
+          <a:ln w="0">
+            <a:noFill/>
+          </a:ln>
+        </p:spPr>
+        <p:txBody>
+          <a:bodyPr lIns="90000" tIns="45000" rIns="90000" bIns="45000" anchor="t">
+            <a:normAutofit/>
+          </a:bodyPr>
+          <a:lstStyle/>
+          <a:p>
+            <a:pPr indent="0">
+              <a:lnSpc>
+                <a:spcPct val="100000"/>
+              </a:lnSpc>
+              <a:spcBef>
+                <a:spcPts val="581"/>
+              </a:spcBef>
+              <a:buNone/>
+              <a:tabLst>
+                <a:tab pos="0" algn="l"/>
+              </a:tabLst>
+            </a:pPr>
+            <a:r>
+              <a:rPr lang="en-US" sz="2400" b="0" u="none" strike="noStrike">
+                <a:solidFill>
+                  <a:srgbClr val="008000"/>
+                </a:solidFill>
+                <a:effectLst/>
+                <a:uFillTx/>
+                <a:latin typeface="Consolas"/>
+              </a:rPr>
+              <a:t>// Pass by value </a:t>
+            </a:r>
+            <a:br>
+              <a:rPr sz="2400"/>
+            </a:br>
+            <a:r>
+              <a:rPr lang="en-US" sz="2400" b="0" u="none" strike="noStrike">
+                <a:solidFill>
+                  <a:srgbClr val="0000FF"/>
+                </a:solidFill>
+                <a:effectLst/>
+                <a:uFillTx/>
+                <a:latin typeface="Consolas"/>
+              </a:rPr>
+              <a:t>void</a:t>
+            </a:r>
+            <a:r>
+              <a:rPr lang="en-US" sz="2400" b="0" u="none" strike="noStrike">
+                <a:solidFill>
+                  <a:srgbClr val="000000"/>
+                </a:solidFill>
+                <a:effectLst/>
+                <a:uFillTx/>
+                <a:latin typeface="Consolas"/>
+              </a:rPr>
+              <a:t> foo (</a:t>
+            </a:r>
+            <a:r>
+              <a:rPr lang="en-US" sz="2400" b="0" u="none" strike="noStrike">
+                <a:solidFill>
+                  <a:srgbClr val="0000FF"/>
+                </a:solidFill>
+                <a:effectLst/>
+                <a:uFillTx/>
+                <a:latin typeface="Consolas"/>
+              </a:rPr>
+              <a:t>int</a:t>
+            </a:r>
+            <a:r>
+              <a:rPr lang="en-US" sz="2400" b="0" u="none" strike="noStrike">
+                <a:solidFill>
+                  <a:srgbClr val="000000"/>
+                </a:solidFill>
+                <a:effectLst/>
+                <a:uFillTx/>
+                <a:latin typeface="Consolas"/>
+              </a:rPr>
+              <a:t> a) </a:t>
+            </a:r>
+            <a:br>
+              <a:rPr sz="2400"/>
+            </a:br>
+            <a:r>
+              <a:rPr lang="en-US" sz="2400" b="0" u="none" strike="noStrike">
+                <a:solidFill>
+                  <a:srgbClr val="000000"/>
+                </a:solidFill>
+                <a:effectLst/>
+                <a:uFillTx/>
+                <a:latin typeface="Consolas"/>
+              </a:rPr>
+              <a:t>{ </a:t>
+            </a:r>
+            <a:br>
+              <a:rPr sz="2400"/>
+            </a:br>
+            <a:r>
+              <a:rPr lang="en-US" sz="2400" b="0" u="none" strike="noStrike">
+                <a:solidFill>
+                  <a:srgbClr val="000000"/>
+                </a:solidFill>
+                <a:effectLst/>
+                <a:uFillTx/>
+                <a:latin typeface="Consolas"/>
+              </a:rPr>
+              <a:t>   ... </a:t>
+            </a:r>
+            <a:br>
+              <a:rPr sz="2400"/>
+            </a:br>
+            <a:r>
+              <a:rPr lang="en-US" sz="2400" b="0" u="none" strike="noStrike">
+                <a:solidFill>
+                  <a:srgbClr val="000000"/>
+                </a:solidFill>
+                <a:effectLst/>
+                <a:uFillTx/>
+                <a:latin typeface="Consolas"/>
+              </a:rPr>
+              <a:t>} </a:t>
+            </a:r>
+            <a:br>
+              <a:rPr sz="2400"/>
+            </a:br>
+            <a:r>
+              <a:rPr lang="en-US" sz="2400" b="0" u="none" strike="noStrike">
+                <a:solidFill>
+                  <a:srgbClr val="008000"/>
+                </a:solidFill>
+                <a:effectLst/>
+                <a:uFillTx/>
+                <a:latin typeface="Consolas"/>
+              </a:rPr>
+              <a:t>// Pass by pointer </a:t>
+            </a:r>
+            <a:br>
+              <a:rPr sz="2400"/>
+            </a:br>
+            <a:r>
+              <a:rPr lang="en-US" sz="2400" b="0" u="none" strike="noStrike">
+                <a:solidFill>
+                  <a:srgbClr val="0000FF"/>
+                </a:solidFill>
+                <a:effectLst/>
+                <a:uFillTx/>
+                <a:latin typeface="Consolas"/>
+              </a:rPr>
+              <a:t>void</a:t>
+            </a:r>
+            <a:r>
+              <a:rPr lang="en-US" sz="2400" b="0" u="none" strike="noStrike">
+                <a:solidFill>
+                  <a:srgbClr val="000000"/>
+                </a:solidFill>
+                <a:effectLst/>
+                <a:uFillTx/>
+                <a:latin typeface="Consolas"/>
+              </a:rPr>
+              <a:t> foo (</a:t>
+            </a:r>
+            <a:r>
+              <a:rPr lang="en-US" sz="2400" b="0" u="none" strike="noStrike">
+                <a:solidFill>
+                  <a:srgbClr val="0000FF"/>
+                </a:solidFill>
+                <a:effectLst/>
+                <a:uFillTx/>
+                <a:latin typeface="Consolas"/>
+              </a:rPr>
+              <a:t>int</a:t>
+            </a:r>
+            <a:r>
+              <a:rPr lang="en-US" sz="2400" b="0" u="none" strike="noStrike">
+                <a:solidFill>
+                  <a:srgbClr val="000000"/>
+                </a:solidFill>
+                <a:effectLst/>
+                <a:uFillTx/>
+                <a:latin typeface="Consolas"/>
+              </a:rPr>
+              <a:t> *pa) </a:t>
+            </a:r>
+            <a:br>
+              <a:rPr sz="2400"/>
+            </a:br>
+            <a:r>
+              <a:rPr lang="en-US" sz="2400" b="0" u="none" strike="noStrike">
+                <a:solidFill>
+                  <a:srgbClr val="000000"/>
+                </a:solidFill>
+                <a:effectLst/>
+                <a:uFillTx/>
+                <a:latin typeface="Consolas"/>
+              </a:rPr>
+              <a:t>{ </a:t>
+            </a:r>
+            <a:br>
+              <a:rPr sz="2400"/>
+            </a:br>
+            <a:r>
+              <a:rPr lang="en-US" sz="2400" b="0" u="none" strike="noStrike">
+                <a:solidFill>
+                  <a:srgbClr val="000000"/>
+                </a:solidFill>
+                <a:effectLst/>
+                <a:uFillTx/>
+                <a:latin typeface="Consolas"/>
+              </a:rPr>
+              <a:t>   ... </a:t>
+            </a:r>
+            <a:br>
+              <a:rPr sz="2400"/>
+            </a:br>
+            <a:r>
+              <a:rPr lang="en-US" sz="2400" b="0" u="none" strike="noStrike">
+                <a:solidFill>
+                  <a:srgbClr val="000000"/>
+                </a:solidFill>
+                <a:effectLst/>
+                <a:uFillTx/>
+                <a:latin typeface="Consolas"/>
+              </a:rPr>
+              <a:t>}</a:t>
+            </a:r>
+            <a:endParaRPr lang="en-US" sz="2400" b="0" u="none" strike="noStrike">
+              <a:solidFill>
+                <a:srgbClr val="000000"/>
+              </a:solidFill>
+              <a:effectLst/>
+              <a:uFillTx/>
+              <a:latin typeface="Arial"/>
+            </a:endParaRPr>
+          </a:p>
+        </p:txBody>
+      </p:sp>
+      <p:sp>
+        <p:nvSpPr>
+          <p:cNvPr id="63" name="Text Box 4"/>
+          <p:cNvSpPr/>
+          <p:nvPr/>
+        </p:nvSpPr>
+        <p:spPr>
+          <a:xfrm>
+            <a:off x="4381560" y="1076760"/>
+            <a:ext cx="4562280" cy="4298040"/>
+          </a:xfrm>
+          <a:prstGeom prst="rect">
+            <a:avLst/>
+          </a:prstGeom>
+          <a:noFill/>
+          <a:ln w="12600">
+            <a:noFill/>
+          </a:ln>
+        </p:spPr>
+        <p:style>
+          <a:lnRef idx="0">
+            <a:scrgbClr r="0" g="0" b="0"/>
+          </a:lnRef>
+          <a:fillRef idx="0">
+            <a:scrgbClr r="0" g="0" b="0"/>
+          </a:fillRef>
+          <a:effectRef idx="0">
+            <a:scrgbClr r="0" g="0" b="0"/>
+          </a:effectRef>
+          <a:fontRef idx="minor"/>
+        </p:style>
+        <p:txBody>
+          <a:bodyPr lIns="182880" tIns="137160" rIns="182880" bIns="137160" anchor="t">
+            <a:spAutoFit/>
+          </a:bodyPr>
+          <a:lstStyle/>
+          <a:p>
+            <a:pPr>
+              <a:lnSpc>
+                <a:spcPct val="100000"/>
+              </a:lnSpc>
+            </a:pPr>
+            <a:r>
+              <a:rPr lang="en-US" sz="2400" b="0" u="none" strike="noStrike">
+                <a:solidFill>
+                  <a:srgbClr val="008000"/>
+                </a:solidFill>
+                <a:effectLst/>
+                <a:uFillTx/>
+                <a:latin typeface="Consolas"/>
+              </a:rPr>
+              <a:t>// pass by ref </a:t>
+            </a:r>
+            <a:br>
+              <a:rPr sz="2400"/>
+            </a:br>
+            <a:r>
+              <a:rPr lang="en-US" sz="2400" b="0" u="none" strike="noStrike">
+                <a:solidFill>
+                  <a:srgbClr val="0000FF"/>
+                </a:solidFill>
+                <a:effectLst/>
+                <a:uFillTx/>
+                <a:latin typeface="Consolas"/>
+              </a:rPr>
+              <a:t>void</a:t>
+            </a:r>
+            <a:r>
+              <a:rPr lang="en-US" sz="2400" b="0" u="none" strike="noStrike">
+                <a:solidFill>
+                  <a:srgbClr val="000000"/>
+                </a:solidFill>
+                <a:effectLst/>
+                <a:uFillTx/>
+                <a:latin typeface="Consolas"/>
+              </a:rPr>
+              <a:t> foo (</a:t>
+            </a:r>
+            <a:r>
+              <a:rPr lang="en-US" sz="2400" b="0" u="none" strike="noStrike">
+                <a:solidFill>
+                  <a:srgbClr val="0000FF"/>
+                </a:solidFill>
+                <a:effectLst/>
+                <a:uFillTx/>
+                <a:latin typeface="Consolas"/>
+              </a:rPr>
+              <a:t>int</a:t>
+            </a:r>
+            <a:r>
+              <a:rPr lang="en-US" sz="2400" b="0" u="none" strike="noStrike">
+                <a:solidFill>
+                  <a:srgbClr val="000000"/>
+                </a:solidFill>
+                <a:effectLst/>
+                <a:uFillTx/>
+                <a:latin typeface="Consolas"/>
+              </a:rPr>
+              <a:t> &amp;a) </a:t>
+            </a:r>
+            <a:br>
+              <a:rPr sz="2400"/>
+            </a:br>
+            <a:r>
+              <a:rPr lang="en-US" sz="2400" b="0" u="none" strike="noStrike">
+                <a:solidFill>
+                  <a:srgbClr val="000000"/>
+                </a:solidFill>
+                <a:effectLst/>
+                <a:uFillTx/>
+                <a:latin typeface="Consolas"/>
+              </a:rPr>
+              <a:t>{ </a:t>
+            </a:r>
+            <a:br>
+              <a:rPr sz="2400"/>
+            </a:br>
+            <a:r>
+              <a:rPr lang="en-US" sz="2400" b="0" u="none" strike="noStrike">
+                <a:solidFill>
+                  <a:srgbClr val="000000"/>
+                </a:solidFill>
+                <a:effectLst/>
+                <a:uFillTx/>
+                <a:latin typeface="Consolas"/>
+              </a:rPr>
+              <a:t>   ... </a:t>
+            </a:r>
+            <a:br>
+              <a:rPr sz="2400"/>
+            </a:br>
+            <a:r>
+              <a:rPr lang="en-US" sz="2400" b="0" u="none" strike="noStrike">
+                <a:solidFill>
+                  <a:srgbClr val="000000"/>
+                </a:solidFill>
+                <a:effectLst/>
+                <a:uFillTx/>
+                <a:latin typeface="Consolas"/>
+              </a:rPr>
+              <a:t>} </a:t>
+            </a:r>
+            <a:endParaRPr lang="en-US" sz="2400" b="0" u="none" strike="noStrike">
+              <a:solidFill>
+                <a:srgbClr val="FFFFFF"/>
+              </a:solidFill>
+              <a:effectLst/>
+              <a:uFillTx/>
+              <a:latin typeface="Arial"/>
+            </a:endParaRPr>
+          </a:p>
+          <a:p>
+            <a:pPr>
+              <a:lnSpc>
+                <a:spcPct val="100000"/>
+              </a:lnSpc>
+            </a:pPr>
+            <a:endParaRPr lang="en-US" sz="2400" b="0" u="none" strike="noStrike">
+              <a:solidFill>
+                <a:srgbClr val="FFFFFF"/>
+              </a:solidFill>
+              <a:effectLst/>
+              <a:uFillTx/>
+              <a:latin typeface="Arial"/>
+            </a:endParaRPr>
+          </a:p>
+          <a:p>
+            <a:pPr>
+              <a:lnSpc>
+                <a:spcPct val="100000"/>
+              </a:lnSpc>
+            </a:pPr>
+            <a:r>
+              <a:rPr lang="en-US" sz="2400" b="0" u="none" strike="noStrike">
+                <a:solidFill>
+                  <a:srgbClr val="008000"/>
+                </a:solidFill>
+                <a:effectLst/>
+                <a:uFillTx/>
+                <a:latin typeface="Consolas"/>
+              </a:rPr>
+              <a:t>// pass by const ref </a:t>
+            </a:r>
+            <a:br>
+              <a:rPr sz="2400"/>
+            </a:br>
+            <a:r>
+              <a:rPr lang="en-US" sz="2400" b="0" u="none" strike="noStrike">
+                <a:solidFill>
+                  <a:srgbClr val="0000FF"/>
+                </a:solidFill>
+                <a:effectLst/>
+                <a:uFillTx/>
+                <a:latin typeface="Consolas"/>
+              </a:rPr>
+              <a:t>void</a:t>
+            </a:r>
+            <a:r>
+              <a:rPr lang="en-US" sz="2400" b="0" u="none" strike="noStrike">
+                <a:solidFill>
+                  <a:srgbClr val="000000"/>
+                </a:solidFill>
+                <a:effectLst/>
+                <a:uFillTx/>
+                <a:latin typeface="Consolas"/>
+              </a:rPr>
+              <a:t> foo (</a:t>
+            </a:r>
+            <a:r>
+              <a:rPr lang="en-US" sz="2400" b="0" u="none" strike="noStrike">
+                <a:solidFill>
+                  <a:srgbClr val="0000FF"/>
+                </a:solidFill>
+                <a:effectLst/>
+                <a:uFillTx/>
+                <a:latin typeface="Consolas"/>
+              </a:rPr>
+              <a:t>const</a:t>
+            </a:r>
+            <a:r>
+              <a:rPr lang="en-US" sz="2400" b="0" u="none" strike="noStrike">
+                <a:solidFill>
+                  <a:srgbClr val="000000"/>
+                </a:solidFill>
+                <a:effectLst/>
+                <a:uFillTx/>
+                <a:latin typeface="Consolas"/>
+              </a:rPr>
+              <a:t> </a:t>
+            </a:r>
+            <a:r>
+              <a:rPr lang="en-US" sz="2400" b="0" u="none" strike="noStrike">
+                <a:solidFill>
+                  <a:srgbClr val="0000FF"/>
+                </a:solidFill>
+                <a:effectLst/>
+                <a:uFillTx/>
+                <a:latin typeface="Consolas"/>
+              </a:rPr>
+              <a:t>int</a:t>
+            </a:r>
+            <a:r>
+              <a:rPr lang="en-US" sz="2400" b="0" u="none" strike="noStrike">
+                <a:solidFill>
+                  <a:srgbClr val="000000"/>
+                </a:solidFill>
+                <a:effectLst/>
+                <a:uFillTx/>
+                <a:latin typeface="Consolas"/>
+              </a:rPr>
+              <a:t> &amp;a) </a:t>
+            </a:r>
+            <a:br>
+              <a:rPr sz="2400"/>
+            </a:br>
+            <a:r>
+              <a:rPr lang="en-US" sz="2400" b="0" u="none" strike="noStrike">
+                <a:solidFill>
+                  <a:srgbClr val="000000"/>
+                </a:solidFill>
+                <a:effectLst/>
+                <a:uFillTx/>
+                <a:latin typeface="Consolas"/>
+              </a:rPr>
+              <a:t>{ </a:t>
+            </a:r>
+            <a:br>
+              <a:rPr sz="2400"/>
+            </a:br>
+            <a:r>
+              <a:rPr lang="en-US" sz="2400" b="0" u="none" strike="noStrike">
+                <a:solidFill>
+                  <a:srgbClr val="000000"/>
+                </a:solidFill>
+                <a:effectLst/>
+                <a:uFillTx/>
+                <a:latin typeface="Consolas"/>
+              </a:rPr>
+              <a:t>   ... </a:t>
+            </a:r>
+            <a:br>
+              <a:rPr sz="2400"/>
+            </a:br>
+            <a:r>
+              <a:rPr lang="en-US" sz="2400" b="0" u="none" strike="noStrike">
+                <a:solidFill>
+                  <a:srgbClr val="000000"/>
+                </a:solidFill>
+                <a:effectLst/>
+                <a:uFillTx/>
+                <a:latin typeface="Consolas"/>
+              </a:rPr>
+              <a:t>} </a:t>
+            </a:r>
+            <a:endParaRPr lang="en-US" sz="2400" b="0" u="none" strike="noStrike">
+              <a:solidFill>
+                <a:srgbClr val="FFFFFF"/>
+              </a:solidFill>
+              <a:effectLst/>
+              <a:uFillTx/>
+              <a:latin typeface="Arial"/>
+            </a:endParaRPr>
+          </a:p>
+        </p:txBody>
+      </p:sp>
+      <p:sp>
+        <p:nvSpPr>
+          <p:cNvPr id="64" name="Line 5"/>
+          <p:cNvSpPr/>
+          <p:nvPr/>
+        </p:nvSpPr>
+        <p:spPr>
+          <a:xfrm>
+            <a:off x="4381200" y="1143000"/>
+            <a:ext cx="360" cy="2666880"/>
+          </a:xfrm>
+          <a:prstGeom prst="line">
+            <a:avLst/>
+          </a:prstGeom>
+          <a:ln w="12600">
+            <a:solidFill>
+              <a:srgbClr val="000000"/>
+            </a:solidFill>
+            <a:round/>
+          </a:ln>
+        </p:spPr>
+        <p:style>
+          <a:lnRef idx="0">
+            <a:scrgbClr r="0" g="0" b="0"/>
+          </a:lnRef>
+          <a:fillRef idx="0">
+            <a:scrgbClr r="0" g="0" b="0"/>
+          </a:fillRef>
+          <a:effectRef idx="0">
+            <a:scrgbClr r="0" g="0" b="0"/>
+          </a:effectRef>
+          <a:fontRef idx="minor"/>
+        </p:style>
+        <p:txBody>
+          <a:bodyPr lIns="182880" tIns="137160" rIns="182880" bIns="137160" anchor="ctr" anchorCtr="1">
+            <a:noAutofit/>
+          </a:bodyPr>
+          <a:lstStyle/>
+          <a:p>
+            <a:endParaRPr lang="en-US" sz="2400" b="0" u="none" strike="noStrike">
+              <a:solidFill>
+                <a:srgbClr val="FFFFFF"/>
+              </a:solidFill>
+              <a:effectLst/>
+              <a:uFillTx/>
+              <a:latin typeface="Arial"/>
+            </a:endParaRPr>
+          </a:p>
+        </p:txBody>
+      </p:sp>
+      <p:sp>
+        <p:nvSpPr>
+          <p:cNvPr id="65" name="Rectangle 7"/>
+          <p:cNvSpPr/>
+          <p:nvPr/>
+        </p:nvSpPr>
+        <p:spPr>
+          <a:xfrm>
+            <a:off x="449280" y="5226120"/>
+            <a:ext cx="8123040" cy="1399680"/>
+          </a:xfrm>
+          <a:prstGeom prst="rect">
+            <a:avLst/>
+          </a:prstGeom>
+          <a:blipFill rotWithShape="0">
+            <a:blip r:embed="rId2"/>
+            <a:srcRect/>
+            <a:tile tx="0" ty="0" sx="69982" sy="68571" algn="ctr"/>
+          </a:blipFill>
+          <a:ln w="9360">
+            <a:solidFill>
+              <a:srgbClr val="000000"/>
+            </a:solidFill>
+            <a:round/>
+          </a:ln>
+          <a:effectLst>
+            <a:outerShdw dist="25560" dir="5400000" rotWithShape="0">
+              <a:srgbClr val="000000">
+                <a:alpha val="50000"/>
+              </a:srgbClr>
+            </a:outerShdw>
+          </a:effectLst>
+        </p:spPr>
+        <p:style>
+          <a:lnRef idx="0">
+            <a:scrgbClr r="0" g="0" b="0"/>
+          </a:lnRef>
+          <a:fillRef idx="0">
+            <a:scrgbClr r="0" g="0" b="0"/>
+          </a:fillRef>
+          <a:effectRef idx="0">
+            <a:scrgbClr r="0" g="0" b="0"/>
+          </a:effectRef>
+          <a:fontRef idx="minor"/>
+        </p:style>
+        <p:txBody>
+          <a:bodyPr lIns="90360" tIns="44280" rIns="90360" bIns="44280" anchor="t">
+            <a:noAutofit/>
+          </a:bodyPr>
+          <a:lstStyle/>
+          <a:p>
+            <a:pPr marL="285840" indent="-285480">
+              <a:lnSpc>
+                <a:spcPct val="90000"/>
+              </a:lnSpc>
+              <a:buClr>
+                <a:srgbClr val="000000"/>
+              </a:buClr>
+              <a:buFont typeface="Symbol" charset="2"/>
+              <a:buChar char=""/>
+            </a:pPr>
+            <a:r>
+              <a:rPr lang="en-US" sz="2800" b="0" u="none" strike="noStrike">
+                <a:solidFill>
+                  <a:srgbClr val="000000"/>
+                </a:solidFill>
+                <a:effectLst/>
+                <a:uFillTx/>
+                <a:latin typeface="Arial"/>
+              </a:rPr>
+              <a:t>Avoid copying objects</a:t>
+            </a:r>
+            <a:br>
+              <a:rPr sz="2800"/>
+            </a:br>
+            <a:r>
+              <a:rPr lang="en-US" sz="2800" b="0" u="none" strike="noStrike">
+                <a:solidFill>
+                  <a:srgbClr val="000000"/>
+                </a:solidFill>
+                <a:effectLst/>
+                <a:uFillTx/>
+                <a:latin typeface="Arial"/>
+              </a:rPr>
+              <a:t>     without allowing changes in their value.</a:t>
+            </a:r>
+          </a:p>
+        </p:txBody>
+      </p:sp>
+    </p:spTree>
+  </p:cSld>
+  <p:clrMapOvr>
+    <a:masterClrMapping/>
+  </p:clrMapOvr>
+</p:sld>
+</file>
+
+<file path=ppt/slides/slide11.xml><?xml version="1.0" encoding="utf-8"?>
+<p:sld xmlns:a="http://schemas.openxmlformats.org/drawingml/2006/main" xmlns:r="http://schemas.openxmlformats.org/officeDocument/2006/relationships" xmlns:p="http://schemas.openxmlformats.org/presentationml/2006/main">
+  <p:cSld>
+    <p:spTree>
+      <p:nvGrpSpPr>
+        <p:cNvPr id="1" name=""/>
+        <p:cNvGrpSpPr/>
+        <p:nvPr/>
+      </p:nvGrpSpPr>
+      <p:grpSpPr>
+        <a:xfrm>
+          <a:off x="0" y="0"/>
+          <a:ext cx="0" cy="0"/>
+          <a:chOff x="0" y="0"/>
+          <a:chExt cx="0" cy="0"/>
+        </a:xfrm>
+      </p:grpSpPr>
+      <p:sp>
+        <p:nvSpPr>
           <p:cNvPr id="66" name="PlaceHolder 1"/>
           <p:cNvSpPr>
             <a:spLocks noGrp="1"/>
@@ -3882,7 +4741,7 @@
         </p:spPr>
         <p:txBody>
           <a:bodyPr lIns="90000" tIns="45000" rIns="90000" bIns="91440" anchor="b">
-            <a:normAutofit fontScale="92500" lnSpcReduction="19999"/>
+            <a:normAutofit fontScale="90000"/>
           </a:bodyPr>
           <a:lstStyle/>
           <a:p>
@@ -3973,7 +4832,7 @@
                 <a:uFillTx/>
                 <a:latin typeface="Arial"/>
               </a:rPr>
-              <a:t>10</a:t>
+              <a:t>11</a:t>
             </a:fld>
             <a:endParaRPr lang="en-US" sz="1400" b="0" u="none" strike="noStrike">
               <a:solidFill>
@@ -4675,7 +5534,7 @@
 </p:sld>
 </file>
 
-<file path=ppt/slides/slide11.xml><?xml version="1.0" encoding="utf-8"?>
+<file path=ppt/slides/slide12.xml><?xml version="1.0" encoding="utf-8"?>
 <p:sld xmlns:a="http://schemas.openxmlformats.org/drawingml/2006/main" xmlns:r="http://schemas.openxmlformats.org/officeDocument/2006/relationships" xmlns:p="http://schemas.openxmlformats.org/presentationml/2006/main">
   <p:cSld>
     <p:spTree>
@@ -5176,7 +6035,7 @@
                 <a:uFillTx/>
                 <a:latin typeface="Arial"/>
               </a:rPr>
-              <a:t>11</a:t>
+              <a:t>12</a:t>
             </a:fld>
             <a:endParaRPr lang="en-US" sz="1400" b="0" u="none" strike="noStrike">
               <a:solidFill>
@@ -5197,7 +6056,7 @@
 </p:sld>
 </file>
 
-<file path=ppt/slides/slide12.xml><?xml version="1.0" encoding="utf-8"?>
+<file path=ppt/slides/slide13.xml><?xml version="1.0" encoding="utf-8"?>
 <p:sld xmlns:a="http://schemas.openxmlformats.org/drawingml/2006/main" xmlns:r="http://schemas.openxmlformats.org/officeDocument/2006/relationships" xmlns:p="http://schemas.openxmlformats.org/presentationml/2006/main">
   <p:cSld>
     <p:spTree>
@@ -6068,7 +6927,7 @@
                 <a:uFillTx/>
                 <a:latin typeface="Arial"/>
               </a:rPr>
-              <a:t>12</a:t>
+              <a:t>13</a:t>
             </a:fld>
             <a:endParaRPr lang="en-US" sz="1400" b="0" u="none" strike="noStrike">
               <a:solidFill>
@@ -6089,7 +6948,7 @@
 </p:sld>
 </file>
 
-<file path=ppt/slides/slide13.xml><?xml version="1.0" encoding="utf-8"?>
+<file path=ppt/slides/slide14.xml><?xml version="1.0" encoding="utf-8"?>
 <p:sld xmlns:a="http://schemas.openxmlformats.org/drawingml/2006/main" xmlns:r="http://schemas.openxmlformats.org/officeDocument/2006/relationships" xmlns:p="http://schemas.openxmlformats.org/presentationml/2006/main">
   <p:cSld>
     <p:spTree>
@@ -6131,7 +6990,7 @@
         </p:spPr>
         <p:txBody>
           <a:bodyPr lIns="90000" tIns="45000" rIns="90000" bIns="91440" anchor="b">
-            <a:normAutofit fontScale="92500" lnSpcReduction="19999"/>
+            <a:normAutofit fontScale="90000"/>
           </a:bodyPr>
           <a:lstStyle/>
           <a:p>
@@ -6244,7 +7103,7 @@
                 <a:uFillTx/>
                 <a:latin typeface="Arial"/>
               </a:rPr>
-              <a:t>13</a:t>
+              <a:t>14</a:t>
             </a:fld>
             <a:endParaRPr lang="en-US" sz="1400" b="0" u="none" strike="noStrike">
               <a:solidFill>
@@ -7091,7 +7950,7 @@
 </p:sld>
 </file>
 
-<file path=ppt/slides/slide14.xml><?xml version="1.0" encoding="utf-8"?>
+<file path=ppt/slides/slide15.xml><?xml version="1.0" encoding="utf-8"?>
 <p:sld xmlns:a="http://schemas.openxmlformats.org/drawingml/2006/main" xmlns:r="http://schemas.openxmlformats.org/officeDocument/2006/relationships" xmlns:p="http://schemas.openxmlformats.org/presentationml/2006/main">
   <p:cSld>
     <p:spTree>
@@ -7133,7 +7992,7 @@
         </p:spPr>
         <p:txBody>
           <a:bodyPr lIns="90000" tIns="45000" rIns="90000" bIns="91440" anchor="b">
-            <a:normAutofit fontScale="85000" lnSpcReduction="9999"/>
+            <a:normAutofit fontScale="90000"/>
           </a:bodyPr>
           <a:lstStyle/>
           <a:p>
@@ -7467,7 +8326,7 @@
                 <a:uFillTx/>
                 <a:latin typeface="Arial"/>
               </a:rPr>
-              <a:t>14</a:t>
+              <a:t>15</a:t>
             </a:fld>
             <a:endParaRPr lang="en-US" sz="1400" b="0" u="none" strike="noStrike">
               <a:solidFill>
@@ -7488,7 +8347,7 @@
 </p:sld>
 </file>
 
-<file path=ppt/slides/slide15.xml><?xml version="1.0" encoding="utf-8"?>
+<file path=ppt/slides/slide16.xml><?xml version="1.0" encoding="utf-8"?>
 <p:sld xmlns:a="http://schemas.openxmlformats.org/drawingml/2006/main" xmlns:r="http://schemas.openxmlformats.org/officeDocument/2006/relationships" xmlns:p="http://schemas.openxmlformats.org/presentationml/2006/main">
   <p:cSld>
     <p:spTree>
@@ -8094,7 +8953,7 @@
                 <a:uFillTx/>
                 <a:latin typeface="Arial"/>
               </a:rPr>
-              <a:t>15</a:t>
+              <a:t>16</a:t>
             </a:fld>
             <a:endParaRPr lang="en-US" sz="1400" b="0" u="none" strike="noStrike">
               <a:solidFill>
@@ -8132,7 +8991,7 @@
         </p:spPr>
         <p:txBody>
           <a:bodyPr lIns="90000" tIns="45000" rIns="90000" bIns="91440" anchor="b">
-            <a:normAutofit lnSpcReduction="9999"/>
+            <a:normAutofit fontScale="90000"/>
           </a:bodyPr>
           <a:lstStyle/>
           <a:p>
@@ -8172,7 +9031,7 @@
 </p:sld>
 </file>
 
-<file path=ppt/slides/slide16.xml><?xml version="1.0" encoding="utf-8"?>
+<file path=ppt/slides/slide17.xml><?xml version="1.0" encoding="utf-8"?>
 <p:sld xmlns:a="http://schemas.openxmlformats.org/drawingml/2006/main" xmlns:r="http://schemas.openxmlformats.org/officeDocument/2006/relationships" xmlns:p="http://schemas.openxmlformats.org/presentationml/2006/main">
   <p:cSld>
     <p:spTree>
@@ -8852,7 +9711,7 @@
                 <a:uFillTx/>
                 <a:latin typeface="Arial"/>
               </a:rPr>
-              <a:t>16</a:t>
+              <a:t>17</a:t>
             </a:fld>
             <a:endParaRPr lang="en-US" sz="1400" b="0" u="none" strike="noStrike">
               <a:solidFill>
@@ -8890,7 +9749,7 @@
         </p:spPr>
         <p:txBody>
           <a:bodyPr lIns="90000" tIns="45000" rIns="90000" bIns="91440" anchor="b">
-            <a:normAutofit lnSpcReduction="9999"/>
+            <a:normAutofit fontScale="90000"/>
           </a:bodyPr>
           <a:lstStyle/>
           <a:p>
@@ -8972,7 +9831,7 @@
         </p:spPr>
         <p:txBody>
           <a:bodyPr lIns="90000" tIns="45000" rIns="90000" bIns="91440" anchor="b">
-            <a:normAutofit fontScale="92500" lnSpcReduction="19999"/>
+            <a:normAutofit fontScale="90000"/>
           </a:bodyPr>
           <a:lstStyle/>
           <a:p>
@@ -10012,7 +10871,7 @@
         </p:spPr>
         <p:txBody>
           <a:bodyPr lIns="90000" tIns="45000" rIns="90000" bIns="91440" anchor="b">
-            <a:normAutofit fontScale="92500" lnSpcReduction="19999"/>
+            <a:normAutofit fontScale="90000"/>
           </a:bodyPr>
           <a:lstStyle/>
           <a:p>
@@ -10505,7 +11364,7 @@
         </p:spPr>
         <p:txBody>
           <a:bodyPr lIns="90000" tIns="45000" rIns="90000" bIns="91440" anchor="b">
-            <a:normAutofit fontScale="92500" lnSpcReduction="19999"/>
+            <a:normAutofit fontScale="90000"/>
           </a:bodyPr>
           <a:lstStyle/>
           <a:p>
@@ -11786,7 +12645,7 @@
         </p:spPr>
         <p:txBody>
           <a:bodyPr lIns="90000" tIns="45000" rIns="90000" bIns="91440" anchor="b">
-            <a:normAutofit fontScale="92500" lnSpcReduction="19999"/>
+            <a:normAutofit fontScale="90000"/>
           </a:bodyPr>
           <a:lstStyle/>
           <a:p>
@@ -12494,7 +13353,7 @@
         </p:spPr>
         <p:txBody>
           <a:bodyPr lIns="90000" tIns="45000" rIns="90000" bIns="91440" anchor="b">
-            <a:normAutofit fontScale="92500" lnSpcReduction="19999"/>
+            <a:normAutofit fontScale="90000"/>
           </a:bodyPr>
           <a:lstStyle/>
           <a:p>
@@ -13175,7 +14034,7 @@
         </p:spPr>
         <p:txBody>
           <a:bodyPr lIns="90000" tIns="45000" rIns="90000" bIns="91440" anchor="b">
-            <a:normAutofit fontScale="92500" lnSpcReduction="19999"/>
+            <a:normAutofit fontScale="90000"/>
           </a:bodyPr>
           <a:lstStyle/>
           <a:p>
@@ -13856,7 +14715,7 @@
         </p:spPr>
         <p:txBody>
           <a:bodyPr lIns="90000" tIns="45000" rIns="90000" bIns="91440" anchor="b">
-            <a:normAutofit fontScale="92500" lnSpcReduction="19999"/>
+            <a:normAutofit fontScale="90000"/>
           </a:bodyPr>
           <a:lstStyle/>
           <a:p>
@@ -14010,13 +14869,13 @@
                 <a:uFillTx/>
                 <a:latin typeface="Arial"/>
               </a:rPr>
-              <a:t>non-const Reference - initialized only to a non const Lvalue.</a:t>
+              <a:t>Reference - initialized only to an Lvalue.</a:t>
             </a:r>
           </a:p>
           <a:p>
             <a:pPr indent="0">
               <a:lnSpc>
-                <a:spcPct val="100000"/>
+                <a:spcPct val="140000"/>
               </a:lnSpc>
               <a:spcBef>
                 <a:spcPts val="581"/>
@@ -14029,43 +14888,6 @@
             <a:r>
               <a:rPr lang="en-US" sz="2600" b="0" u="none" strike="noStrike">
                 <a:solidFill>
-                  <a:srgbClr val="000000"/>
-                </a:solidFill>
-                <a:effectLst/>
-                <a:uFillTx/>
-                <a:latin typeface="Arial"/>
-                <a:ea typeface="Noto Sans CJK SC Regular"/>
-              </a:rPr>
-              <a:t>const reference – </a:t>
-            </a:r>
-            <a:r>
-              <a:rPr lang="en-US" sz="2600" b="0" u="none" strike="noStrike">
-                <a:solidFill>
-                  <a:srgbClr val="000000"/>
-                </a:solidFill>
-                <a:effectLst/>
-                <a:uFillTx/>
-                <a:latin typeface="Arial"/>
-              </a:rPr>
-              <a:t>initialized to both Lvalue and Rvalue</a:t>
-            </a:r>
-          </a:p>
-          <a:p>
-            <a:pPr indent="0">
-              <a:lnSpc>
-                <a:spcPct val="140000"/>
-              </a:lnSpc>
-              <a:spcBef>
-                <a:spcPts val="581"/>
-              </a:spcBef>
-              <a:buNone/>
-              <a:tabLst>
-                <a:tab pos="0" algn="l"/>
-              </a:tabLst>
-            </a:pPr>
-            <a:r>
-              <a:rPr lang="en-US" sz="2600" b="0" u="none" strike="noStrike">
-                <a:solidFill>
                   <a:srgbClr val="0000FF"/>
                 </a:solidFill>
                 <a:effectLst/>
@@ -14124,7 +14946,7 @@
                 <a:latin typeface="Consolas"/>
                 <a:ea typeface="Noto Sans CJK SC Regular"/>
               </a:rPr>
-              <a:t>const</a:t>
+              <a:t>int</a:t>
             </a:r>
             <a:r>
               <a:rPr lang="en-US" sz="2600" b="0" u="none" strike="noStrike">
@@ -14136,55 +14958,7 @@
                 <a:latin typeface="Consolas"/>
                 <a:ea typeface="Noto Sans CJK SC Regular"/>
               </a:rPr>
-              <a:t> </a:t>
-            </a:r>
-            <a:r>
-              <a:rPr lang="en-US" sz="2600" b="0" u="none" strike="noStrike">
-                <a:solidFill>
-                  <a:srgbClr val="0000FF"/>
-                </a:solidFill>
-                <a:effectLst/>
-                <a:uFillTx/>
-                <a:latin typeface="Consolas"/>
-                <a:ea typeface="Noto Sans CJK SC Regular"/>
-              </a:rPr>
-              <a:t>int</a:t>
-            </a:r>
-            <a:r>
-              <a:rPr lang="en-US" sz="2600" b="0" u="none" strike="noStrike">
-                <a:solidFill>
-                  <a:srgbClr val="000000"/>
-                </a:solidFill>
-                <a:effectLst/>
-                <a:uFillTx/>
-                <a:latin typeface="Consolas"/>
-                <a:ea typeface="Noto Sans CJK SC Regular"/>
-              </a:rPr>
-              <a:t> clv=</a:t>
-            </a:r>
-            <a:r>
-              <a:rPr lang="en-US" sz="2600" b="0" u="none" strike="noStrike">
-                <a:solidFill>
-                  <a:srgbClr val="800080"/>
-                </a:solidFill>
-                <a:effectLst/>
-                <a:uFillTx/>
-                <a:latin typeface="Consolas"/>
-                <a:ea typeface="Noto Sans CJK SC Regular"/>
-              </a:rPr>
-              <a:t>2</a:t>
-            </a:r>
-            <a:r>
-              <a:rPr lang="en-US" sz="2600" b="0" u="none" strike="noStrike">
-                <a:solidFill>
-                  <a:srgbClr val="000000"/>
-                </a:solidFill>
-                <a:effectLst/>
-                <a:uFillTx/>
-                <a:latin typeface="Consolas"/>
-                <a:ea typeface="Noto Sans CJK SC Regular"/>
-              </a:rPr>
-              <a:t>; </a:t>
+              <a:t>&amp; lvr1=lv; </a:t>
             </a:r>
             <a:br>
               <a:rPr sz="2600"/>
@@ -14211,7 +14985,19 @@
                 <a:latin typeface="Consolas"/>
                 <a:ea typeface="Noto Sans CJK SC Regular"/>
               </a:rPr>
-              <a:t>&amp; lvr1=lv; </a:t>
+              <a:t>&amp; lvr2=5; </a:t>
+            </a:r>
+            <a:r>
+              <a:rPr lang="en-US" sz="2600" b="0" u="none" strike="noStrike">
+                <a:solidFill>
+                  <a:srgbClr val="FF0000"/>
+                </a:solidFill>
+                <a:effectLst/>
+                <a:uFillTx/>
+                <a:latin typeface="Consolas"/>
+                <a:ea typeface="Noto Sans CJK SC Regular"/>
+              </a:rPr>
+              <a:t>//error! </a:t>
             </a:r>
             <a:br>
               <a:rPr sz="2600"/>
@@ -14238,7 +15024,7 @@
                 <a:latin typeface="Consolas"/>
                 <a:ea typeface="Noto Sans CJK SC Regular"/>
               </a:rPr>
-              <a:t>&amp; lvr2=5; </a:t>
+              <a:t>&amp; lvr3=5+lv; </a:t>
             </a:r>
             <a:r>
               <a:rPr lang="en-US" sz="2600" b="0" u="none" strike="noStrike">
@@ -14258,227 +15044,13 @@
             <a:r>
               <a:rPr lang="en-US" sz="2600" b="0" u="none" strike="noStrike">
                 <a:solidFill>
-                  <a:srgbClr val="0000FF"/>
-                </a:solidFill>
-                <a:effectLst/>
-                <a:uFillTx/>
-                <a:latin typeface="Consolas"/>
-                <a:ea typeface="Noto Sans CJK SC Regular"/>
-              </a:rPr>
-              <a:t>int</a:t>
-            </a:r>
-            <a:r>
-              <a:rPr lang="en-US" sz="2600" b="0" u="none" strike="noStrike">
-                <a:solidFill>
-                  <a:srgbClr val="000000"/>
-                </a:solidFill>
-                <a:effectLst/>
-                <a:uFillTx/>
-                <a:latin typeface="Consolas"/>
-                <a:ea typeface="Noto Sans CJK SC Regular"/>
-              </a:rPr>
-              <a:t>&amp; lvr3=5+lv; </a:t>
-            </a:r>
-            <a:r>
-              <a:rPr lang="en-US" sz="2600" b="0" u="none" strike="noStrike">
-                <a:solidFill>
-                  <a:srgbClr val="FF0000"/>
-                </a:solidFill>
-                <a:effectLst/>
-                <a:uFillTx/>
-                <a:latin typeface="Consolas"/>
-                <a:ea typeface="Noto Sans CJK SC Regular"/>
-              </a:rPr>
-              <a:t>//error! </a:t>
-            </a:r>
-            <a:br>
-              <a:rPr sz="2600"/>
-            </a:br>
-            <a:r>
-              <a:rPr lang="en-US" sz="2600" b="0" u="none" strike="noStrike">
-                <a:solidFill>
-                  <a:srgbClr val="0000FF"/>
-                </a:solidFill>
-                <a:effectLst/>
-                <a:uFillTx/>
-                <a:latin typeface="Consolas"/>
-                <a:ea typeface="Noto Sans CJK SC Regular"/>
-              </a:rPr>
-              <a:t>int</a:t>
-            </a:r>
-            <a:r>
-              <a:rPr lang="en-US" sz="2600" b="0" u="none" strike="noStrike">
-                <a:solidFill>
-                  <a:srgbClr val="000000"/>
-                </a:solidFill>
-                <a:effectLst/>
-                <a:uFillTx/>
-                <a:latin typeface="Consolas"/>
-                <a:ea typeface="Noto Sans CJK SC Regular"/>
-              </a:rPr>
-              <a:t>&amp; lvr4=clv;  </a:t>
-            </a:r>
-            <a:r>
-              <a:rPr lang="en-US" sz="2600" b="0" u="none" strike="noStrike">
-                <a:solidFill>
-                  <a:srgbClr val="FF0000"/>
-                </a:solidFill>
-                <a:effectLst/>
-                <a:uFillTx/>
-                <a:latin typeface="Consolas"/>
-                <a:ea typeface="Noto Sans CJK SC Regular"/>
-              </a:rPr>
-              <a:t>//error! prevents lvr4++;</a:t>
-            </a:r>
-            <a:br>
-              <a:rPr sz="2600"/>
-            </a:br>
-            <a:r>
-              <a:rPr lang="en-US" sz="2600" b="0" u="none" strike="noStrike">
-                <a:solidFill>
-                  <a:srgbClr val="0000FF"/>
-                </a:solidFill>
-                <a:effectLst/>
-                <a:uFillTx/>
-                <a:latin typeface="Consolas"/>
-                <a:ea typeface="Noto Sans CJK SC Regular"/>
-              </a:rPr>
-              <a:t>const</a:t>
-            </a:r>
-            <a:r>
-              <a:rPr lang="en-US" sz="2600" b="0" u="none" strike="noStrike">
-                <a:solidFill>
-                  <a:srgbClr val="000000"/>
-                </a:solidFill>
-                <a:effectLst/>
-                <a:uFillTx/>
-                <a:latin typeface="Consolas"/>
-                <a:ea typeface="Noto Sans CJK SC Regular"/>
-              </a:rPr>
-              <a:t> </a:t>
-            </a:r>
-            <a:r>
-              <a:rPr lang="en-US" sz="2600" b="0" u="none" strike="noStrike">
-                <a:solidFill>
-                  <a:srgbClr val="0000FF"/>
-                </a:solidFill>
-                <a:effectLst/>
-                <a:uFillTx/>
-                <a:latin typeface="Consolas"/>
-                <a:ea typeface="Noto Sans CJK SC Regular"/>
-              </a:rPr>
-              <a:t>int</a:t>
-            </a:r>
-            <a:r>
-              <a:rPr lang="en-US" sz="2600" b="0" u="none" strike="noStrike">
-                <a:solidFill>
-                  <a:srgbClr val="000000"/>
-                </a:solidFill>
-                <a:effectLst/>
-                <a:uFillTx/>
-                <a:latin typeface="Consolas"/>
-                <a:ea typeface="Noto Sans CJK SC Regular"/>
-              </a:rPr>
-              <a:t>&amp; cr1=clv;  // This is useful for </a:t>
-            </a:r>
-            <a:br>
-              <a:rPr sz="2600"/>
-            </a:br>
-            <a:r>
-              <a:rPr lang="en-US" sz="2600" b="0" u="none" strike="noStrike">
-                <a:solidFill>
-                  <a:srgbClr val="0000FF"/>
-                </a:solidFill>
-                <a:effectLst/>
-                <a:uFillTx/>
-                <a:latin typeface="Consolas"/>
-                <a:ea typeface="Noto Sans CJK SC Regular"/>
-              </a:rPr>
-              <a:t>const</a:t>
-            </a:r>
-            <a:r>
-              <a:rPr lang="en-US" sz="2600" b="0" u="none" strike="noStrike">
-                <a:solidFill>
-                  <a:srgbClr val="000000"/>
-                </a:solidFill>
-                <a:effectLst/>
-                <a:uFillTx/>
-                <a:latin typeface="Consolas"/>
-                <a:ea typeface="Noto Sans CJK SC Regular"/>
-              </a:rPr>
-              <a:t> </a:t>
-            </a:r>
-            <a:r>
-              <a:rPr lang="en-US" sz="2600" b="0" u="none" strike="noStrike">
-                <a:solidFill>
-                  <a:srgbClr val="0000FF"/>
-                </a:solidFill>
-                <a:effectLst/>
-                <a:uFillTx/>
-                <a:latin typeface="Consolas"/>
-                <a:ea typeface="Noto Sans CJK SC Regular"/>
-              </a:rPr>
-              <a:t>int</a:t>
-            </a:r>
-            <a:r>
-              <a:rPr lang="en-US" sz="2600" b="0" u="none" strike="noStrike">
-                <a:solidFill>
-                  <a:srgbClr val="000000"/>
-                </a:solidFill>
-                <a:effectLst/>
-                <a:uFillTx/>
-                <a:latin typeface="Consolas"/>
-                <a:ea typeface="Noto Sans CJK SC Regular"/>
-              </a:rPr>
-              <a:t>&amp; cr2=</a:t>
-            </a:r>
-            <a:r>
-              <a:rPr lang="en-US" sz="2600" b="0" u="none" strike="noStrike">
-                <a:solidFill>
-                  <a:srgbClr val="800080"/>
-                </a:solidFill>
-                <a:effectLst/>
-                <a:uFillTx/>
-                <a:latin typeface="Consolas"/>
-                <a:ea typeface="Noto Sans CJK SC Regular"/>
-              </a:rPr>
-              <a:t>5</a:t>
-            </a:r>
-            <a:r>
-              <a:rPr lang="en-US" sz="2600" b="0" u="none" strike="noStrike">
-                <a:solidFill>
-                  <a:srgbClr val="000000"/>
-                </a:solidFill>
-                <a:effectLst/>
-                <a:uFillTx/>
-                <a:latin typeface="Consolas"/>
-                <a:ea typeface="Noto Sans CJK SC Regular"/>
-              </a:rPr>
-              <a:t>+</a:t>
-            </a:r>
-            <a:r>
-              <a:rPr lang="en-US" sz="2600" b="0" u="none" strike="noStrike">
-                <a:solidFill>
-                  <a:srgbClr val="800080"/>
-                </a:solidFill>
-                <a:effectLst/>
-                <a:uFillTx/>
-                <a:latin typeface="Consolas"/>
-                <a:ea typeface="Noto Sans CJK SC Regular"/>
-              </a:rPr>
-              <a:t>5</a:t>
-            </a:r>
-            <a:r>
-              <a:rPr lang="en-US" sz="2600" b="0" u="none" strike="noStrike">
-                <a:solidFill>
-                  <a:srgbClr val="000000"/>
-                </a:solidFill>
-                <a:effectLst/>
-                <a:uFillTx/>
-                <a:latin typeface="Consolas"/>
-                <a:ea typeface="Noto Sans CJK SC Regular"/>
-              </a:rPr>
-              <a:t>;  // Functions arguments </a:t>
+                  <a:srgbClr val="000000"/>
+                </a:solidFill>
+                <a:effectLst/>
+                <a:uFillTx/>
+                <a:latin typeface="Consolas"/>
+              </a:rPr>
+              <a:t>                   </a:t>
             </a:r>
             <a:endParaRPr lang="en-US" sz="2600" b="0" u="none" strike="noStrike">
               <a:solidFill>
@@ -14502,17 +15074,6 @@
                 <a:tab pos="0" algn="l"/>
               </a:tabLst>
             </a:pPr>
-            <a:r>
-              <a:rPr lang="en-US" sz="2600" b="0" u="none" strike="noStrike">
-                <a:solidFill>
-                  <a:srgbClr val="000000"/>
-                </a:solidFill>
-                <a:effectLst/>
-                <a:uFillTx/>
-                <a:latin typeface="Consolas"/>
-              </a:rPr>
-              <a:t>                   </a:t>
-            </a:r>
             <a:endParaRPr lang="en-US" sz="2600" b="0" u="none" strike="noStrike">
               <a:solidFill>
                 <a:srgbClr val="000000"/>
@@ -14522,10 +15083,218 @@
               <a:latin typeface="Arial"/>
             </a:endParaRPr>
           </a:p>
+        </p:txBody>
+      </p:sp>
+    </p:spTree>
+  </p:cSld>
+  <p:clrMapOvr>
+    <a:masterClrMapping/>
+  </p:clrMapOvr>
+</p:sld>
+</file>
+
+<file path=ppt/slides/slide9.xml><?xml version="1.0" encoding="utf-8"?>
+<p:sld xmlns:a="http://schemas.openxmlformats.org/drawingml/2006/main" xmlns:r="http://schemas.openxmlformats.org/officeDocument/2006/relationships" xmlns:p="http://schemas.openxmlformats.org/presentationml/2006/main">
+  <p:cSld>
+    <p:spTree>
+      <p:nvGrpSpPr>
+        <p:cNvPr id="1" name="">
+          <a:extLst>
+            <a:ext uri="{FF2B5EF4-FFF2-40B4-BE49-F238E27FC236}">
+              <a16:creationId xmlns:a16="http://schemas.microsoft.com/office/drawing/2014/main" id="{9A109EE6-D4C0-B91C-8898-B552A315D914}"/>
+            </a:ext>
+          </a:extLst>
+        </p:cNvPr>
+        <p:cNvGrpSpPr/>
+        <p:nvPr/>
+      </p:nvGrpSpPr>
+      <p:grpSpPr>
+        <a:xfrm>
+          <a:off x="0" y="0"/>
+          <a:ext cx="0" cy="0"/>
+          <a:chOff x="0" y="0"/>
+          <a:chExt cx="0" cy="0"/>
+        </a:xfrm>
+      </p:grpSpPr>
+      <p:sp>
+        <p:nvSpPr>
+          <p:cNvPr id="56" name="PlaceHolder 1">
+            <a:extLst>
+              <a:ext uri="{FF2B5EF4-FFF2-40B4-BE49-F238E27FC236}">
+                <a16:creationId xmlns:a16="http://schemas.microsoft.com/office/drawing/2014/main" id="{4E4AF576-1289-5C23-F726-0DA0615FE246}"/>
+              </a:ext>
+            </a:extLst>
+          </p:cNvPr>
+          <p:cNvSpPr>
+            <a:spLocks noGrp="1"/>
+          </p:cNvSpPr>
+          <p:nvPr>
+            <p:ph type="title"/>
+          </p:nvPr>
+        </p:nvSpPr>
+        <p:spPr>
+          <a:xfrm>
+            <a:off x="304920" y="274680"/>
+            <a:ext cx="8534160" cy="639360"/>
+          </a:xfrm>
+          <a:prstGeom prst="rect">
+            <a:avLst/>
+          </a:prstGeom>
+          <a:noFill/>
+          <a:ln w="0">
+            <a:noFill/>
+          </a:ln>
+        </p:spPr>
+        <p:txBody>
+          <a:bodyPr lIns="90000" tIns="45000" rIns="90000" bIns="91440" anchor="b">
+            <a:normAutofit fontScale="90000"/>
+          </a:bodyPr>
+          <a:lstStyle/>
           <a:p>
             <a:pPr indent="0">
               <a:lnSpc>
-                <a:spcPct val="140000"/>
+                <a:spcPct val="100000"/>
+              </a:lnSpc>
+              <a:buNone/>
+            </a:pPr>
+            <a:r>
+              <a:rPr lang="en-US" sz="4000" b="0" u="none" strike="noStrike">
+                <a:solidFill>
+                  <a:srgbClr val="696464"/>
+                </a:solidFill>
+                <a:effectLst/>
+                <a:uFillTx/>
+                <a:latin typeface="Arial"/>
+              </a:rPr>
+              <a:t>Initializing references with L/Rvalue</a:t>
+            </a:r>
+            <a:endParaRPr lang="en-US" sz="4000" b="0" u="none" strike="noStrike">
+              <a:solidFill>
+                <a:srgbClr val="000000"/>
+              </a:solidFill>
+              <a:effectLst/>
+              <a:uFillTx/>
+              <a:latin typeface="Arial"/>
+            </a:endParaRPr>
+          </a:p>
+        </p:txBody>
+      </p:sp>
+      <p:sp>
+        <p:nvSpPr>
+          <p:cNvPr id="57" name="PlaceHolder 2">
+            <a:extLst>
+              <a:ext uri="{FF2B5EF4-FFF2-40B4-BE49-F238E27FC236}">
+                <a16:creationId xmlns:a16="http://schemas.microsoft.com/office/drawing/2014/main" id="{B79C875F-3930-AC81-4192-471A6E973669}"/>
+              </a:ext>
+            </a:extLst>
+          </p:cNvPr>
+          <p:cNvSpPr>
+            <a:spLocks noGrp="1"/>
+          </p:cNvSpPr>
+          <p:nvPr>
+            <p:ph type="sldNum" idx="17"/>
+          </p:nvPr>
+        </p:nvSpPr>
+        <p:spPr>
+          <a:xfrm>
+            <a:off x="0" y="6553080"/>
+            <a:ext cx="304560" cy="304560"/>
+          </a:xfrm>
+          <a:prstGeom prst="rect">
+            <a:avLst/>
+          </a:prstGeom>
+          <a:noFill/>
+          <a:ln w="0">
+            <a:noFill/>
+          </a:ln>
+        </p:spPr>
+        <p:txBody>
+          <a:bodyPr lIns="0" tIns="0" rIns="0" bIns="0" anchor="ctr" anchorCtr="1">
+            <a:noAutofit/>
+          </a:bodyPr>
+          <a:lstStyle>
+            <a:lvl1pPr indent="0" algn="ctr">
+              <a:lnSpc>
+                <a:spcPct val="100000"/>
+              </a:lnSpc>
+              <a:buNone/>
+              <a:defRPr lang="en-US" sz="1400" b="0" u="none" strike="noStrike">
+                <a:solidFill>
+                  <a:srgbClr val="FFFFFF"/>
+                </a:solidFill>
+                <a:effectLst/>
+                <a:uFillTx/>
+                <a:latin typeface="Arial"/>
+              </a:defRPr>
+            </a:lvl1pPr>
+          </a:lstStyle>
+          <a:p>
+            <a:pPr indent="0" algn="ctr">
+              <a:lnSpc>
+                <a:spcPct val="100000"/>
+              </a:lnSpc>
+              <a:buNone/>
+            </a:pPr>
+            <a:fld id="{53ABD44A-C17F-496A-BEA4-CF1DBACF7A4E}" type="slidenum">
+              <a:rPr lang="en-US" sz="1400" b="0" u="none" strike="noStrike">
+                <a:solidFill>
+                  <a:srgbClr val="FFFFFF"/>
+                </a:solidFill>
+                <a:effectLst/>
+                <a:uFillTx/>
+                <a:latin typeface="Arial"/>
+              </a:rPr>
+              <a:t>9</a:t>
+            </a:fld>
+            <a:endParaRPr lang="en-US" sz="1400" b="0" u="none" strike="noStrike">
+              <a:solidFill>
+                <a:srgbClr val="FFFFFF"/>
+              </a:solidFill>
+              <a:effectLst/>
+              <a:uFillTx/>
+              <a:latin typeface="Times New Roman"/>
+            </a:endParaRPr>
+          </a:p>
+        </p:txBody>
+      </p:sp>
+      <p:sp>
+        <p:nvSpPr>
+          <p:cNvPr id="58" name="PlaceHolder 3">
+            <a:extLst>
+              <a:ext uri="{FF2B5EF4-FFF2-40B4-BE49-F238E27FC236}">
+                <a16:creationId xmlns:a16="http://schemas.microsoft.com/office/drawing/2014/main" id="{2541D07C-D005-9CC7-C763-D0751396CB81}"/>
+              </a:ext>
+            </a:extLst>
+          </p:cNvPr>
+          <p:cNvSpPr>
+            <a:spLocks noGrp="1"/>
+          </p:cNvSpPr>
+          <p:nvPr>
+            <p:ph/>
+          </p:nvPr>
+        </p:nvSpPr>
+        <p:spPr>
+          <a:xfrm>
+            <a:off x="380880" y="822960"/>
+            <a:ext cx="8534160" cy="5714640"/>
+          </a:xfrm>
+          <a:prstGeom prst="rect">
+            <a:avLst/>
+          </a:prstGeom>
+          <a:noFill/>
+          <a:ln w="0">
+            <a:noFill/>
+          </a:ln>
+        </p:spPr>
+        <p:txBody>
+          <a:bodyPr lIns="90000" tIns="45000" rIns="90000" bIns="45000" anchor="t">
+            <a:normAutofit fontScale="92500" lnSpcReduction="9999"/>
+          </a:bodyPr>
+          <a:lstStyle/>
+          <a:p>
+            <a:pPr indent="0">
+              <a:lnSpc>
+                <a:spcPct val="100000"/>
               </a:lnSpc>
               <a:spcBef>
                 <a:spcPts val="581"/>
@@ -14535,6 +15304,485 @@
                 <a:tab pos="0" algn="l"/>
               </a:tabLst>
             </a:pPr>
+            <a:r>
+              <a:rPr lang="en-US" sz="2600" b="0" u="none" strike="noStrike">
+                <a:solidFill>
+                  <a:srgbClr val="000000"/>
+                </a:solidFill>
+                <a:effectLst/>
+                <a:uFillTx/>
+                <a:latin typeface="Arial"/>
+              </a:rPr>
+              <a:t>non-const Reference - initialized only to a non const Lvalue.</a:t>
+            </a:r>
+          </a:p>
+          <a:p>
+            <a:pPr indent="0">
+              <a:lnSpc>
+                <a:spcPct val="100000"/>
+              </a:lnSpc>
+              <a:spcBef>
+                <a:spcPts val="581"/>
+              </a:spcBef>
+              <a:buNone/>
+              <a:tabLst>
+                <a:tab pos="0" algn="l"/>
+              </a:tabLst>
+            </a:pPr>
+            <a:r>
+              <a:rPr lang="en-US" sz="2600" b="0" u="none" strike="noStrike">
+                <a:solidFill>
+                  <a:srgbClr val="000000"/>
+                </a:solidFill>
+                <a:effectLst/>
+                <a:uFillTx/>
+                <a:latin typeface="Arial"/>
+                <a:ea typeface="Noto Sans CJK SC Regular"/>
+              </a:rPr>
+              <a:t>const reference – </a:t>
+            </a:r>
+            <a:r>
+              <a:rPr lang="en-US" sz="2600" b="0" u="none" strike="noStrike">
+                <a:solidFill>
+                  <a:srgbClr val="000000"/>
+                </a:solidFill>
+                <a:effectLst/>
+                <a:uFillTx/>
+                <a:latin typeface="Arial"/>
+              </a:rPr>
+              <a:t>initialized to both Lvalue and Rvalue</a:t>
+            </a:r>
+          </a:p>
+          <a:p>
+            <a:pPr indent="0">
+              <a:lnSpc>
+                <a:spcPct val="140000"/>
+              </a:lnSpc>
+              <a:spcBef>
+                <a:spcPts val="581"/>
+              </a:spcBef>
+              <a:buNone/>
+              <a:tabLst>
+                <a:tab pos="0" algn="l"/>
+              </a:tabLst>
+            </a:pPr>
+            <a:r>
+              <a:rPr lang="en-US" sz="2600" b="0" u="none" strike="noStrike">
+                <a:solidFill>
+                  <a:srgbClr val="0000FF"/>
+                </a:solidFill>
+                <a:effectLst/>
+                <a:uFillTx/>
+                <a:latin typeface="Consolas"/>
+                <a:ea typeface="Noto Sans CJK SC Regular"/>
+              </a:rPr>
+              <a:t>int</a:t>
+            </a:r>
+            <a:r>
+              <a:rPr lang="en-US" sz="2600" b="0" u="none" strike="noStrike">
+                <a:solidFill>
+                  <a:srgbClr val="000000"/>
+                </a:solidFill>
+                <a:effectLst/>
+                <a:uFillTx/>
+                <a:latin typeface="Consolas"/>
+                <a:ea typeface="Noto Sans CJK SC Regular"/>
+              </a:rPr>
+              <a:t> lv=</a:t>
+            </a:r>
+            <a:r>
+              <a:rPr lang="en-US" sz="2600" b="0" u="none" strike="noStrike">
+                <a:solidFill>
+                  <a:srgbClr val="800080"/>
+                </a:solidFill>
+                <a:effectLst/>
+                <a:uFillTx/>
+                <a:latin typeface="Consolas"/>
+                <a:ea typeface="Noto Sans CJK SC Regular"/>
+              </a:rPr>
+              <a:t>1</a:t>
+            </a:r>
+            <a:r>
+              <a:rPr lang="en-US" sz="2600" b="0" u="none" strike="noStrike">
+                <a:solidFill>
+                  <a:srgbClr val="000000"/>
+                </a:solidFill>
+                <a:effectLst/>
+                <a:uFillTx/>
+                <a:latin typeface="Consolas"/>
+                <a:ea typeface="Noto Sans CJK SC Regular"/>
+              </a:rPr>
+              <a:t>; </a:t>
+            </a:r>
+            <a:br>
+              <a:rPr sz="2600"/>
+            </a:br>
+            <a:r>
+              <a:rPr lang="en-US" sz="2600" b="0" u="none" strike="noStrike">
+                <a:solidFill>
+                  <a:srgbClr val="0000FF"/>
+                </a:solidFill>
+                <a:effectLst/>
+                <a:uFillTx/>
+                <a:latin typeface="Consolas"/>
+                <a:ea typeface="Noto Sans CJK SC Regular"/>
+              </a:rPr>
+              <a:t>const</a:t>
+            </a:r>
+            <a:r>
+              <a:rPr lang="en-US" sz="2600" b="0" u="none" strike="noStrike">
+                <a:solidFill>
+                  <a:srgbClr val="000000"/>
+                </a:solidFill>
+                <a:effectLst/>
+                <a:uFillTx/>
+                <a:latin typeface="Consolas"/>
+                <a:ea typeface="Noto Sans CJK SC Regular"/>
+              </a:rPr>
+              <a:t> </a:t>
+            </a:r>
+            <a:r>
+              <a:rPr lang="en-US" sz="2600" b="0" u="none" strike="noStrike">
+                <a:solidFill>
+                  <a:srgbClr val="0000FF"/>
+                </a:solidFill>
+                <a:effectLst/>
+                <a:uFillTx/>
+                <a:latin typeface="Consolas"/>
+                <a:ea typeface="Noto Sans CJK SC Regular"/>
+              </a:rPr>
+              <a:t>int</a:t>
+            </a:r>
+            <a:r>
+              <a:rPr lang="en-US" sz="2600" b="0" u="none" strike="noStrike">
+                <a:solidFill>
+                  <a:srgbClr val="000000"/>
+                </a:solidFill>
+                <a:effectLst/>
+                <a:uFillTx/>
+                <a:latin typeface="Consolas"/>
+                <a:ea typeface="Noto Sans CJK SC Regular"/>
+              </a:rPr>
+              <a:t> clv=</a:t>
+            </a:r>
+            <a:r>
+              <a:rPr lang="en-US" sz="2600" b="0" u="none" strike="noStrike">
+                <a:solidFill>
+                  <a:srgbClr val="800080"/>
+                </a:solidFill>
+                <a:effectLst/>
+                <a:uFillTx/>
+                <a:latin typeface="Consolas"/>
+                <a:ea typeface="Noto Sans CJK SC Regular"/>
+              </a:rPr>
+              <a:t>2</a:t>
+            </a:r>
+            <a:r>
+              <a:rPr lang="en-US" sz="2600" b="0" u="none" strike="noStrike">
+                <a:solidFill>
+                  <a:srgbClr val="000000"/>
+                </a:solidFill>
+                <a:effectLst/>
+                <a:uFillTx/>
+                <a:latin typeface="Consolas"/>
+                <a:ea typeface="Noto Sans CJK SC Regular"/>
+              </a:rPr>
+              <a:t>; </a:t>
+            </a:r>
+            <a:br>
+              <a:rPr sz="2600"/>
+            </a:br>
+            <a:r>
+              <a:rPr lang="en-US" sz="2600" b="0" u="none" strike="noStrike">
+                <a:solidFill>
+                  <a:srgbClr val="0000FF"/>
+                </a:solidFill>
+                <a:effectLst/>
+                <a:uFillTx/>
+                <a:latin typeface="Consolas"/>
+                <a:ea typeface="Noto Sans CJK SC Regular"/>
+              </a:rPr>
+              <a:t>int</a:t>
+            </a:r>
+            <a:r>
+              <a:rPr lang="en-US" sz="2600" b="0" u="none" strike="noStrike">
+                <a:solidFill>
+                  <a:srgbClr val="000000"/>
+                </a:solidFill>
+                <a:effectLst/>
+                <a:uFillTx/>
+                <a:latin typeface="Consolas"/>
+                <a:ea typeface="Noto Sans CJK SC Regular"/>
+              </a:rPr>
+              <a:t>&amp; lvr1=lv; </a:t>
+            </a:r>
+            <a:br>
+              <a:rPr sz="2600"/>
+            </a:br>
+            <a:r>
+              <a:rPr lang="en-US" sz="2600" b="0" u="none" strike="noStrike">
+                <a:solidFill>
+                  <a:srgbClr val="0000FF"/>
+                </a:solidFill>
+                <a:effectLst/>
+                <a:uFillTx/>
+                <a:latin typeface="Consolas"/>
+                <a:ea typeface="Noto Sans CJK SC Regular"/>
+              </a:rPr>
+              <a:t>int</a:t>
+            </a:r>
+            <a:r>
+              <a:rPr lang="en-US" sz="2600" b="0" u="none" strike="noStrike">
+                <a:solidFill>
+                  <a:srgbClr val="000000"/>
+                </a:solidFill>
+                <a:effectLst/>
+                <a:uFillTx/>
+                <a:latin typeface="Consolas"/>
+                <a:ea typeface="Noto Sans CJK SC Regular"/>
+              </a:rPr>
+              <a:t>&amp; lvr2=5; </a:t>
+            </a:r>
+            <a:r>
+              <a:rPr lang="en-US" sz="2600" b="0" u="none" strike="noStrike">
+                <a:solidFill>
+                  <a:srgbClr val="FF0000"/>
+                </a:solidFill>
+                <a:effectLst/>
+                <a:uFillTx/>
+                <a:latin typeface="Consolas"/>
+                <a:ea typeface="Noto Sans CJK SC Regular"/>
+              </a:rPr>
+              <a:t>//error! </a:t>
+            </a:r>
+            <a:br>
+              <a:rPr sz="2600"/>
+            </a:br>
+            <a:r>
+              <a:rPr lang="en-US" sz="2600" b="0" u="none" strike="noStrike">
+                <a:solidFill>
+                  <a:srgbClr val="0000FF"/>
+                </a:solidFill>
+                <a:effectLst/>
+                <a:uFillTx/>
+                <a:latin typeface="Consolas"/>
+                <a:ea typeface="Noto Sans CJK SC Regular"/>
+              </a:rPr>
+              <a:t>int</a:t>
+            </a:r>
+            <a:r>
+              <a:rPr lang="en-US" sz="2600" b="0" u="none" strike="noStrike">
+                <a:solidFill>
+                  <a:srgbClr val="000000"/>
+                </a:solidFill>
+                <a:effectLst/>
+                <a:uFillTx/>
+                <a:latin typeface="Consolas"/>
+                <a:ea typeface="Noto Sans CJK SC Regular"/>
+              </a:rPr>
+              <a:t>&amp; lvr3=5+lv; </a:t>
+            </a:r>
+            <a:r>
+              <a:rPr lang="en-US" sz="2600" b="0" u="none" strike="noStrike">
+                <a:solidFill>
+                  <a:srgbClr val="FF0000"/>
+                </a:solidFill>
+                <a:effectLst/>
+                <a:uFillTx/>
+                <a:latin typeface="Consolas"/>
+                <a:ea typeface="Noto Sans CJK SC Regular"/>
+              </a:rPr>
+              <a:t>//error! </a:t>
+            </a:r>
+            <a:br>
+              <a:rPr sz="2600"/>
+            </a:br>
+            <a:r>
+              <a:rPr lang="en-US" sz="2600" b="0" u="none" strike="noStrike">
+                <a:solidFill>
+                  <a:srgbClr val="0000FF"/>
+                </a:solidFill>
+                <a:effectLst/>
+                <a:uFillTx/>
+                <a:latin typeface="Consolas"/>
+                <a:ea typeface="Noto Sans CJK SC Regular"/>
+              </a:rPr>
+              <a:t>int</a:t>
+            </a:r>
+            <a:r>
+              <a:rPr lang="en-US" sz="2600" b="0" u="none" strike="noStrike">
+                <a:solidFill>
+                  <a:srgbClr val="000000"/>
+                </a:solidFill>
+                <a:effectLst/>
+                <a:uFillTx/>
+                <a:latin typeface="Consolas"/>
+                <a:ea typeface="Noto Sans CJK SC Regular"/>
+              </a:rPr>
+              <a:t>&amp; lvr4=clv;  </a:t>
+            </a:r>
+            <a:r>
+              <a:rPr lang="en-US" sz="2600" b="0" u="none" strike="noStrike">
+                <a:solidFill>
+                  <a:srgbClr val="FF0000"/>
+                </a:solidFill>
+                <a:effectLst/>
+                <a:uFillTx/>
+                <a:latin typeface="Consolas"/>
+                <a:ea typeface="Noto Sans CJK SC Regular"/>
+              </a:rPr>
+              <a:t>//error! prevents lvr4++;</a:t>
+            </a:r>
+            <a:br>
+              <a:rPr sz="2600"/>
+            </a:br>
+            <a:r>
+              <a:rPr lang="en-US" sz="2600" b="0" u="none" strike="noStrike">
+                <a:solidFill>
+                  <a:srgbClr val="0000FF"/>
+                </a:solidFill>
+                <a:effectLst/>
+                <a:uFillTx/>
+                <a:latin typeface="Consolas"/>
+                <a:ea typeface="Noto Sans CJK SC Regular"/>
+              </a:rPr>
+              <a:t>const</a:t>
+            </a:r>
+            <a:r>
+              <a:rPr lang="en-US" sz="2600" b="0" u="none" strike="noStrike">
+                <a:solidFill>
+                  <a:srgbClr val="000000"/>
+                </a:solidFill>
+                <a:effectLst/>
+                <a:uFillTx/>
+                <a:latin typeface="Consolas"/>
+                <a:ea typeface="Noto Sans CJK SC Regular"/>
+              </a:rPr>
+              <a:t> </a:t>
+            </a:r>
+            <a:r>
+              <a:rPr lang="en-US" sz="2600" b="0" u="none" strike="noStrike">
+                <a:solidFill>
+                  <a:srgbClr val="0000FF"/>
+                </a:solidFill>
+                <a:effectLst/>
+                <a:uFillTx/>
+                <a:latin typeface="Consolas"/>
+                <a:ea typeface="Noto Sans CJK SC Regular"/>
+              </a:rPr>
+              <a:t>int</a:t>
+            </a:r>
+            <a:r>
+              <a:rPr lang="en-US" sz="2600" b="0" u="none" strike="noStrike">
+                <a:solidFill>
+                  <a:srgbClr val="000000"/>
+                </a:solidFill>
+                <a:effectLst/>
+                <a:uFillTx/>
+                <a:latin typeface="Consolas"/>
+                <a:ea typeface="Noto Sans CJK SC Regular"/>
+              </a:rPr>
+              <a:t>&amp; cr1=clv;  // This is useful for </a:t>
+            </a:r>
+            <a:br>
+              <a:rPr sz="2600"/>
+            </a:br>
+            <a:r>
+              <a:rPr lang="en-US" sz="2600" b="0" u="none" strike="noStrike">
+                <a:solidFill>
+                  <a:srgbClr val="0000FF"/>
+                </a:solidFill>
+                <a:effectLst/>
+                <a:uFillTx/>
+                <a:latin typeface="Consolas"/>
+                <a:ea typeface="Noto Sans CJK SC Regular"/>
+              </a:rPr>
+              <a:t>const</a:t>
+            </a:r>
+            <a:r>
+              <a:rPr lang="en-US" sz="2600" b="0" u="none" strike="noStrike">
+                <a:solidFill>
+                  <a:srgbClr val="000000"/>
+                </a:solidFill>
+                <a:effectLst/>
+                <a:uFillTx/>
+                <a:latin typeface="Consolas"/>
+                <a:ea typeface="Noto Sans CJK SC Regular"/>
+              </a:rPr>
+              <a:t> </a:t>
+            </a:r>
+            <a:r>
+              <a:rPr lang="en-US" sz="2600" b="0" u="none" strike="noStrike">
+                <a:solidFill>
+                  <a:srgbClr val="0000FF"/>
+                </a:solidFill>
+                <a:effectLst/>
+                <a:uFillTx/>
+                <a:latin typeface="Consolas"/>
+                <a:ea typeface="Noto Sans CJK SC Regular"/>
+              </a:rPr>
+              <a:t>int</a:t>
+            </a:r>
+            <a:r>
+              <a:rPr lang="en-US" sz="2600" b="0" u="none" strike="noStrike">
+                <a:solidFill>
+                  <a:srgbClr val="000000"/>
+                </a:solidFill>
+                <a:effectLst/>
+                <a:uFillTx/>
+                <a:latin typeface="Consolas"/>
+                <a:ea typeface="Noto Sans CJK SC Regular"/>
+              </a:rPr>
+              <a:t>&amp; cr2=</a:t>
+            </a:r>
+            <a:r>
+              <a:rPr lang="en-US" sz="2600" b="0" u="none" strike="noStrike">
+                <a:solidFill>
+                  <a:srgbClr val="800080"/>
+                </a:solidFill>
+                <a:effectLst/>
+                <a:uFillTx/>
+                <a:latin typeface="Consolas"/>
+                <a:ea typeface="Noto Sans CJK SC Regular"/>
+              </a:rPr>
+              <a:t>5</a:t>
+            </a:r>
+            <a:r>
+              <a:rPr lang="en-US" sz="2600" b="0" u="none" strike="noStrike">
+                <a:solidFill>
+                  <a:srgbClr val="000000"/>
+                </a:solidFill>
+                <a:effectLst/>
+                <a:uFillTx/>
+                <a:latin typeface="Consolas"/>
+                <a:ea typeface="Noto Sans CJK SC Regular"/>
+              </a:rPr>
+              <a:t>+</a:t>
+            </a:r>
+            <a:r>
+              <a:rPr lang="en-US" sz="2600" b="0" u="none" strike="noStrike">
+                <a:solidFill>
+                  <a:srgbClr val="800080"/>
+                </a:solidFill>
+                <a:effectLst/>
+                <a:uFillTx/>
+                <a:latin typeface="Consolas"/>
+                <a:ea typeface="Noto Sans CJK SC Regular"/>
+              </a:rPr>
+              <a:t>5</a:t>
+            </a:r>
+            <a:r>
+              <a:rPr lang="en-US" sz="2600" b="0" u="none" strike="noStrike">
+                <a:solidFill>
+                  <a:srgbClr val="000000"/>
+                </a:solidFill>
+                <a:effectLst/>
+                <a:uFillTx/>
+                <a:latin typeface="Consolas"/>
+                <a:ea typeface="Noto Sans CJK SC Regular"/>
+              </a:rPr>
+              <a:t>;  // Functions arguments </a:t>
+            </a:r>
             <a:endParaRPr lang="en-US" sz="2600" b="0" u="none" strike="noStrike">
               <a:solidFill>
                 <a:srgbClr val="000000"/>
@@ -14544,11 +15792,72 @@
               <a:latin typeface="Arial"/>
             </a:endParaRPr>
           </a:p>
+          <a:p>
+            <a:pPr indent="0">
+              <a:lnSpc>
+                <a:spcPct val="140000"/>
+              </a:lnSpc>
+              <a:spcBef>
+                <a:spcPts val="581"/>
+              </a:spcBef>
+              <a:buNone/>
+              <a:tabLst>
+                <a:tab pos="0" algn="l"/>
+              </a:tabLst>
+            </a:pPr>
+            <a:r>
+              <a:rPr lang="en-US" sz="2600" b="0" u="none" strike="noStrike">
+                <a:solidFill>
+                  <a:srgbClr val="000000"/>
+                </a:solidFill>
+                <a:effectLst/>
+                <a:uFillTx/>
+                <a:latin typeface="Consolas"/>
+              </a:rPr>
+              <a:t>                   </a:t>
+            </a:r>
+            <a:endParaRPr lang="en-US" sz="2600" b="0" u="none" strike="noStrike">
+              <a:solidFill>
+                <a:srgbClr val="000000"/>
+              </a:solidFill>
+              <a:effectLst/>
+              <a:uFillTx/>
+              <a:latin typeface="Arial"/>
+            </a:endParaRPr>
+          </a:p>
+          <a:p>
+            <a:pPr indent="0">
+              <a:lnSpc>
+                <a:spcPct val="140000"/>
+              </a:lnSpc>
+              <a:spcBef>
+                <a:spcPts val="581"/>
+              </a:spcBef>
+              <a:buNone/>
+              <a:tabLst>
+                <a:tab pos="0" algn="l"/>
+              </a:tabLst>
+            </a:pPr>
+            <a:endParaRPr lang="en-US" sz="2600" b="0" u="none" strike="noStrike">
+              <a:solidFill>
+                <a:srgbClr val="000000"/>
+              </a:solidFill>
+              <a:effectLst/>
+              <a:uFillTx/>
+              <a:latin typeface="Arial"/>
+            </a:endParaRPr>
+          </a:p>
         </p:txBody>
       </p:sp>
       <p:sp>
         <p:nvSpPr>
-          <p:cNvPr id="59" name="מלבן 5"/>
+          <p:cNvPr id="59" name="מלבן 5">
+            <a:extLst>
+              <a:ext uri="{FF2B5EF4-FFF2-40B4-BE49-F238E27FC236}">
+                <a16:creationId xmlns:a16="http://schemas.microsoft.com/office/drawing/2014/main" id="{94586A56-7C79-FFC5-9847-4E7D3152AB6A}"/>
+              </a:ext>
+            </a:extLst>
+          </p:cNvPr>
           <p:cNvSpPr/>
           <p:nvPr/>
         </p:nvSpPr>
@@ -14598,859 +15907,11 @@
         </p:txBody>
       </p:sp>
     </p:spTree>
-  </p:cSld>
-  <p:clrMapOvr>
-    <a:masterClrMapping/>
-  </p:clrMapOvr>
-</p:sld>
-</file>
-
-<file path=ppt/slides/slide9.xml><?xml version="1.0" encoding="utf-8"?>
-<p:sld xmlns:a="http://schemas.openxmlformats.org/drawingml/2006/main" xmlns:r="http://schemas.openxmlformats.org/officeDocument/2006/relationships" xmlns:p="http://schemas.openxmlformats.org/presentationml/2006/main">
-  <p:cSld>
-    <p:spTree>
-      <p:nvGrpSpPr>
-        <p:cNvPr id="1" name=""/>
-        <p:cNvGrpSpPr/>
-        <p:nvPr/>
-      </p:nvGrpSpPr>
-      <p:grpSpPr>
-        <a:xfrm>
-          <a:off x="0" y="0"/>
-          <a:ext cx="0" cy="0"/>
-          <a:chOff x="0" y="0"/>
-          <a:chExt cx="0" cy="0"/>
-        </a:xfrm>
-      </p:grpSpPr>
-      <p:sp>
-        <p:nvSpPr>
-          <p:cNvPr id="60" name="PlaceHolder 1"/>
-          <p:cNvSpPr>
-            <a:spLocks noGrp="1"/>
-          </p:cNvSpPr>
-          <p:nvPr>
-            <p:ph type="title"/>
-          </p:nvPr>
-        </p:nvSpPr>
-        <p:spPr>
-          <a:xfrm>
-            <a:off x="304920" y="274680"/>
-            <a:ext cx="8534160" cy="715680"/>
-          </a:xfrm>
-          <a:prstGeom prst="rect">
-            <a:avLst/>
-          </a:prstGeom>
-          <a:noFill/>
-          <a:ln w="0">
-            <a:noFill/>
-          </a:ln>
-        </p:spPr>
-        <p:txBody>
-          <a:bodyPr lIns="90000" tIns="45000" rIns="90000" bIns="91440" anchor="b">
-            <a:normAutofit/>
-          </a:bodyPr>
-          <a:lstStyle/>
-          <a:p>
-            <a:pPr indent="0">
-              <a:lnSpc>
-                <a:spcPct val="100000"/>
-              </a:lnSpc>
-              <a:buNone/>
-            </a:pPr>
-            <a:r>
-              <a:rPr lang="en-US" sz="3200" b="0" u="none" strike="noStrike">
-                <a:solidFill>
-                  <a:srgbClr val="696464"/>
-                </a:solidFill>
-                <a:effectLst/>
-                <a:uFillTx/>
-                <a:latin typeface="Arial"/>
-              </a:rPr>
-              <a:t>Passing arguments by const reference</a:t>
-            </a:r>
-            <a:endParaRPr lang="en-US" sz="3200" b="0" u="none" strike="noStrike">
-              <a:solidFill>
-                <a:srgbClr val="000000"/>
-              </a:solidFill>
-              <a:effectLst/>
-              <a:uFillTx/>
-              <a:latin typeface="Arial"/>
-            </a:endParaRPr>
-          </a:p>
-        </p:txBody>
-      </p:sp>
-      <p:sp>
-        <p:nvSpPr>
-          <p:cNvPr id="61" name="PlaceHolder 2"/>
-          <p:cNvSpPr>
-            <a:spLocks noGrp="1"/>
-          </p:cNvSpPr>
-          <p:nvPr>
-            <p:ph type="sldNum" idx="18"/>
-          </p:nvPr>
-        </p:nvSpPr>
-        <p:spPr>
-          <a:xfrm>
-            <a:off x="0" y="6553080"/>
-            <a:ext cx="304560" cy="304560"/>
-          </a:xfrm>
-          <a:prstGeom prst="rect">
-            <a:avLst/>
-          </a:prstGeom>
-          <a:noFill/>
-          <a:ln w="0">
-            <a:noFill/>
-          </a:ln>
-        </p:spPr>
-        <p:txBody>
-          <a:bodyPr lIns="0" tIns="0" rIns="0" bIns="0" anchor="ctr" anchorCtr="1">
-            <a:noAutofit/>
-          </a:bodyPr>
-          <a:lstStyle>
-            <a:lvl1pPr indent="0" algn="ctr">
-              <a:lnSpc>
-                <a:spcPct val="100000"/>
-              </a:lnSpc>
-              <a:buNone/>
-              <a:defRPr lang="en-US" sz="1400" b="0" u="none" strike="noStrike">
-                <a:solidFill>
-                  <a:srgbClr val="FFFFFF"/>
-                </a:solidFill>
-                <a:effectLst/>
-                <a:uFillTx/>
-                <a:latin typeface="Arial"/>
-              </a:defRPr>
-            </a:lvl1pPr>
-          </a:lstStyle>
-          <a:p>
-            <a:pPr indent="0" algn="ctr">
-              <a:lnSpc>
-                <a:spcPct val="100000"/>
-              </a:lnSpc>
-              <a:buNone/>
-            </a:pPr>
-            <a:fld id="{37AE278F-E1E8-42CB-9FA7-C266316A32AA}" type="slidenum">
-              <a:rPr lang="en-US" sz="1400" b="0" u="none" strike="noStrike">
-                <a:solidFill>
-                  <a:srgbClr val="FFFFFF"/>
-                </a:solidFill>
-                <a:effectLst/>
-                <a:uFillTx/>
-                <a:latin typeface="Arial"/>
-              </a:rPr>
-              <a:t>9</a:t>
-            </a:fld>
-            <a:endParaRPr lang="en-US" sz="1400" b="0" u="none" strike="noStrike">
-              <a:solidFill>
-                <a:srgbClr val="FFFFFF"/>
-              </a:solidFill>
-              <a:effectLst/>
-              <a:uFillTx/>
-              <a:latin typeface="Times New Roman"/>
-            </a:endParaRPr>
-          </a:p>
-        </p:txBody>
-      </p:sp>
-      <p:sp>
-        <p:nvSpPr>
-          <p:cNvPr id="62" name="PlaceHolder 3"/>
-          <p:cNvSpPr>
-            <a:spLocks noGrp="1"/>
-          </p:cNvSpPr>
-          <p:nvPr>
-            <p:ph/>
-          </p:nvPr>
-        </p:nvSpPr>
-        <p:spPr>
-          <a:xfrm>
-            <a:off x="304920" y="1143000"/>
-            <a:ext cx="8534160" cy="5714640"/>
-          </a:xfrm>
-          <a:prstGeom prst="rect">
-            <a:avLst/>
-          </a:prstGeom>
-          <a:noFill/>
-          <a:ln w="0">
-            <a:noFill/>
-          </a:ln>
-        </p:spPr>
-        <p:txBody>
-          <a:bodyPr lIns="90000" tIns="45000" rIns="90000" bIns="45000" anchor="t">
-            <a:normAutofit/>
-          </a:bodyPr>
-          <a:lstStyle/>
-          <a:p>
-            <a:pPr indent="0">
-              <a:lnSpc>
-                <a:spcPct val="100000"/>
-              </a:lnSpc>
-              <a:spcBef>
-                <a:spcPts val="581"/>
-              </a:spcBef>
-              <a:buNone/>
-              <a:tabLst>
-                <a:tab pos="0" algn="l"/>
-              </a:tabLst>
-            </a:pPr>
-            <a:r>
-              <a:rPr lang="en-US" sz="2400" b="0" u="none" strike="noStrike">
-                <a:solidFill>
-                  <a:srgbClr val="008000"/>
-                </a:solidFill>
-                <a:effectLst/>
-                <a:uFillTx/>
-                <a:latin typeface="Consolas"/>
-              </a:rPr>
-              <a:t>// Pass by value </a:t>
-            </a:r>
-            <a:br>
-              <a:rPr sz="2400"/>
-            </a:br>
-            <a:r>
-              <a:rPr lang="en-US" sz="2400" b="0" u="none" strike="noStrike">
-                <a:solidFill>
-                  <a:srgbClr val="0000FF"/>
-                </a:solidFill>
-                <a:effectLst/>
-                <a:uFillTx/>
-                <a:latin typeface="Consolas"/>
-              </a:rPr>
-              <a:t>void</a:t>
-            </a:r>
-            <a:r>
-              <a:rPr lang="en-US" sz="2400" b="0" u="none" strike="noStrike">
-                <a:solidFill>
-                  <a:srgbClr val="000000"/>
-                </a:solidFill>
-                <a:effectLst/>
-                <a:uFillTx/>
-                <a:latin typeface="Consolas"/>
-              </a:rPr>
-              <a:t> foo (</a:t>
-            </a:r>
-            <a:r>
-              <a:rPr lang="en-US" sz="2400" b="0" u="none" strike="noStrike">
-                <a:solidFill>
-                  <a:srgbClr val="0000FF"/>
-                </a:solidFill>
-                <a:effectLst/>
-                <a:uFillTx/>
-                <a:latin typeface="Consolas"/>
-              </a:rPr>
-              <a:t>int</a:t>
-            </a:r>
-            <a:r>
-              <a:rPr lang="en-US" sz="2400" b="0" u="none" strike="noStrike">
-                <a:solidFill>
-                  <a:srgbClr val="000000"/>
-                </a:solidFill>
-                <a:effectLst/>
-                <a:uFillTx/>
-                <a:latin typeface="Consolas"/>
-              </a:rPr>
-              <a:t> a) </a:t>
-            </a:r>
-            <a:br>
-              <a:rPr sz="2400"/>
-            </a:br>
-            <a:r>
-              <a:rPr lang="en-US" sz="2400" b="0" u="none" strike="noStrike">
-                <a:solidFill>
-                  <a:srgbClr val="000000"/>
-                </a:solidFill>
-                <a:effectLst/>
-                <a:uFillTx/>
-                <a:latin typeface="Consolas"/>
-              </a:rPr>
-              <a:t>{ </a:t>
-            </a:r>
-            <a:br>
-              <a:rPr sz="2400"/>
-            </a:br>
-            <a:r>
-              <a:rPr lang="en-US" sz="2400" b="0" u="none" strike="noStrike">
-                <a:solidFill>
-                  <a:srgbClr val="000000"/>
-                </a:solidFill>
-                <a:effectLst/>
-                <a:uFillTx/>
-                <a:latin typeface="Consolas"/>
-              </a:rPr>
-              <a:t>   ... </a:t>
-            </a:r>
-            <a:br>
-              <a:rPr sz="2400"/>
-            </a:br>
-            <a:r>
-              <a:rPr lang="en-US" sz="2400" b="0" u="none" strike="noStrike">
-                <a:solidFill>
-                  <a:srgbClr val="000000"/>
-                </a:solidFill>
-                <a:effectLst/>
-                <a:uFillTx/>
-                <a:latin typeface="Consolas"/>
-              </a:rPr>
-              <a:t>} </a:t>
-            </a:r>
-            <a:br>
-              <a:rPr sz="2400"/>
-            </a:br>
-            <a:r>
-              <a:rPr lang="en-US" sz="2400" b="0" u="none" strike="noStrike">
-                <a:solidFill>
-                  <a:srgbClr val="008000"/>
-                </a:solidFill>
-                <a:effectLst/>
-                <a:uFillTx/>
-                <a:latin typeface="Consolas"/>
-              </a:rPr>
-              <a:t>// Pass by pointer </a:t>
-            </a:r>
-            <a:br>
-              <a:rPr sz="2400"/>
-            </a:br>
-            <a:r>
-              <a:rPr lang="en-US" sz="2400" b="0" u="none" strike="noStrike">
-                <a:solidFill>
-                  <a:srgbClr val="0000FF"/>
-                </a:solidFill>
-                <a:effectLst/>
-                <a:uFillTx/>
-                <a:latin typeface="Consolas"/>
-              </a:rPr>
-              <a:t>void</a:t>
-            </a:r>
-            <a:r>
-              <a:rPr lang="en-US" sz="2400" b="0" u="none" strike="noStrike">
-                <a:solidFill>
-                  <a:srgbClr val="000000"/>
-                </a:solidFill>
-                <a:effectLst/>
-                <a:uFillTx/>
-                <a:latin typeface="Consolas"/>
-              </a:rPr>
-              <a:t> foo (</a:t>
-            </a:r>
-            <a:r>
-              <a:rPr lang="en-US" sz="2400" b="0" u="none" strike="noStrike">
-                <a:solidFill>
-                  <a:srgbClr val="0000FF"/>
-                </a:solidFill>
-                <a:effectLst/>
-                <a:uFillTx/>
-                <a:latin typeface="Consolas"/>
-              </a:rPr>
-              <a:t>int</a:t>
-            </a:r>
-            <a:r>
-              <a:rPr lang="en-US" sz="2400" b="0" u="none" strike="noStrike">
-                <a:solidFill>
-                  <a:srgbClr val="000000"/>
-                </a:solidFill>
-                <a:effectLst/>
-                <a:uFillTx/>
-                <a:latin typeface="Consolas"/>
-              </a:rPr>
-              <a:t> *pa) </a:t>
-            </a:r>
-            <a:br>
-              <a:rPr sz="2400"/>
-            </a:br>
-            <a:r>
-              <a:rPr lang="en-US" sz="2400" b="0" u="none" strike="noStrike">
-                <a:solidFill>
-                  <a:srgbClr val="000000"/>
-                </a:solidFill>
-                <a:effectLst/>
-                <a:uFillTx/>
-                <a:latin typeface="Consolas"/>
-              </a:rPr>
-              <a:t>{ </a:t>
-            </a:r>
-            <a:br>
-              <a:rPr sz="2400"/>
-            </a:br>
-            <a:r>
-              <a:rPr lang="en-US" sz="2400" b="0" u="none" strike="noStrike">
-                <a:solidFill>
-                  <a:srgbClr val="000000"/>
-                </a:solidFill>
-                <a:effectLst/>
-                <a:uFillTx/>
-                <a:latin typeface="Consolas"/>
-              </a:rPr>
-              <a:t>   ... </a:t>
-            </a:r>
-            <a:br>
-              <a:rPr sz="2400"/>
-            </a:br>
-            <a:r>
-              <a:rPr lang="en-US" sz="2400" b="0" u="none" strike="noStrike">
-                <a:solidFill>
-                  <a:srgbClr val="000000"/>
-                </a:solidFill>
-                <a:effectLst/>
-                <a:uFillTx/>
-                <a:latin typeface="Consolas"/>
-              </a:rPr>
-              <a:t>}</a:t>
-            </a:r>
-            <a:endParaRPr lang="en-US" sz="2400" b="0" u="none" strike="noStrike">
-              <a:solidFill>
-                <a:srgbClr val="000000"/>
-              </a:solidFill>
-              <a:effectLst/>
-              <a:uFillTx/>
-              <a:latin typeface="Arial"/>
-            </a:endParaRPr>
-          </a:p>
-        </p:txBody>
-      </p:sp>
-      <p:sp>
-        <p:nvSpPr>
-          <p:cNvPr id="63" name="Text Box 4"/>
-          <p:cNvSpPr/>
-          <p:nvPr/>
-        </p:nvSpPr>
-        <p:spPr>
-          <a:xfrm>
-            <a:off x="4381560" y="1076760"/>
-            <a:ext cx="4562280" cy="4298040"/>
-          </a:xfrm>
-          <a:prstGeom prst="rect">
-            <a:avLst/>
-          </a:prstGeom>
-          <a:noFill/>
-          <a:ln w="12600">
-            <a:noFill/>
-          </a:ln>
-        </p:spPr>
-        <p:style>
-          <a:lnRef idx="0">
-            <a:scrgbClr r="0" g="0" b="0"/>
-          </a:lnRef>
-          <a:fillRef idx="0">
-            <a:scrgbClr r="0" g="0" b="0"/>
-          </a:fillRef>
-          <a:effectRef idx="0">
-            <a:scrgbClr r="0" g="0" b="0"/>
-          </a:effectRef>
-          <a:fontRef idx="minor"/>
-        </p:style>
-        <p:txBody>
-          <a:bodyPr lIns="182880" tIns="137160" rIns="182880" bIns="137160" anchor="t">
-            <a:spAutoFit/>
-          </a:bodyPr>
-          <a:lstStyle/>
-          <a:p>
-            <a:pPr>
-              <a:lnSpc>
-                <a:spcPct val="100000"/>
-              </a:lnSpc>
-            </a:pPr>
-            <a:r>
-              <a:rPr lang="en-US" sz="2400" b="0" u="none" strike="noStrike">
-                <a:solidFill>
-                  <a:srgbClr val="008000"/>
-                </a:solidFill>
-                <a:effectLst/>
-                <a:uFillTx/>
-                <a:latin typeface="Consolas"/>
-              </a:rPr>
-              <a:t>// pass by ref </a:t>
-            </a:r>
-            <a:br>
-              <a:rPr sz="2400"/>
-            </a:br>
-            <a:r>
-              <a:rPr lang="en-US" sz="2400" b="0" u="none" strike="noStrike">
-                <a:solidFill>
-                  <a:srgbClr val="0000FF"/>
-                </a:solidFill>
-                <a:effectLst/>
-                <a:uFillTx/>
-                <a:latin typeface="Consolas"/>
-              </a:rPr>
-              <a:t>void</a:t>
-            </a:r>
-            <a:r>
-              <a:rPr lang="en-US" sz="2400" b="0" u="none" strike="noStrike">
-                <a:solidFill>
-                  <a:srgbClr val="000000"/>
-                </a:solidFill>
-                <a:effectLst/>
-                <a:uFillTx/>
-                <a:latin typeface="Consolas"/>
-              </a:rPr>
-              <a:t> foo (</a:t>
-            </a:r>
-            <a:r>
-              <a:rPr lang="en-US" sz="2400" b="0" u="none" strike="noStrike">
-                <a:solidFill>
-                  <a:srgbClr val="0000FF"/>
-                </a:solidFill>
-                <a:effectLst/>
-                <a:uFillTx/>
-                <a:latin typeface="Consolas"/>
-              </a:rPr>
-              <a:t>int</a:t>
-            </a:r>
-            <a:r>
-              <a:rPr lang="en-US" sz="2400" b="0" u="none" strike="noStrike">
-                <a:solidFill>
-                  <a:srgbClr val="000000"/>
-                </a:solidFill>
-                <a:effectLst/>
-                <a:uFillTx/>
-                <a:latin typeface="Consolas"/>
-              </a:rPr>
-              <a:t> &amp;a) </a:t>
-            </a:r>
-            <a:br>
-              <a:rPr sz="2400"/>
-            </a:br>
-            <a:r>
-              <a:rPr lang="en-US" sz="2400" b="0" u="none" strike="noStrike">
-                <a:solidFill>
-                  <a:srgbClr val="000000"/>
-                </a:solidFill>
-                <a:effectLst/>
-                <a:uFillTx/>
-                <a:latin typeface="Consolas"/>
-              </a:rPr>
-              <a:t>{ </a:t>
-            </a:r>
-            <a:br>
-              <a:rPr sz="2400"/>
-            </a:br>
-            <a:r>
-              <a:rPr lang="en-US" sz="2400" b="0" u="none" strike="noStrike">
-                <a:solidFill>
-                  <a:srgbClr val="000000"/>
-                </a:solidFill>
-                <a:effectLst/>
-                <a:uFillTx/>
-                <a:latin typeface="Consolas"/>
-              </a:rPr>
-              <a:t>   ... </a:t>
-            </a:r>
-            <a:br>
-              <a:rPr sz="2400"/>
-            </a:br>
-            <a:r>
-              <a:rPr lang="en-US" sz="2400" b="0" u="none" strike="noStrike">
-                <a:solidFill>
-                  <a:srgbClr val="000000"/>
-                </a:solidFill>
-                <a:effectLst/>
-                <a:uFillTx/>
-                <a:latin typeface="Consolas"/>
-              </a:rPr>
-              <a:t>} </a:t>
-            </a:r>
-            <a:endParaRPr lang="en-US" sz="2400" b="0" u="none" strike="noStrike">
-              <a:solidFill>
-                <a:srgbClr val="FFFFFF"/>
-              </a:solidFill>
-              <a:effectLst/>
-              <a:uFillTx/>
-              <a:latin typeface="Arial"/>
-            </a:endParaRPr>
-          </a:p>
-          <a:p>
-            <a:pPr>
-              <a:lnSpc>
-                <a:spcPct val="100000"/>
-              </a:lnSpc>
-            </a:pPr>
-            <a:endParaRPr lang="en-US" sz="2400" b="0" u="none" strike="noStrike">
-              <a:solidFill>
-                <a:srgbClr val="FFFFFF"/>
-              </a:solidFill>
-              <a:effectLst/>
-              <a:uFillTx/>
-              <a:latin typeface="Arial"/>
-            </a:endParaRPr>
-          </a:p>
-          <a:p>
-            <a:pPr>
-              <a:lnSpc>
-                <a:spcPct val="100000"/>
-              </a:lnSpc>
-            </a:pPr>
-            <a:r>
-              <a:rPr lang="en-US" sz="2400" b="0" u="none" strike="noStrike">
-                <a:solidFill>
-                  <a:srgbClr val="008000"/>
-                </a:solidFill>
-                <a:effectLst/>
-                <a:uFillTx/>
-                <a:latin typeface="Consolas"/>
-              </a:rPr>
-              <a:t>// pass by const ref </a:t>
-            </a:r>
-            <a:br>
-              <a:rPr sz="2400"/>
-            </a:br>
-            <a:r>
-              <a:rPr lang="en-US" sz="2400" b="0" u="none" strike="noStrike">
-                <a:solidFill>
-                  <a:srgbClr val="0000FF"/>
-                </a:solidFill>
-                <a:effectLst/>
-                <a:uFillTx/>
-                <a:latin typeface="Consolas"/>
-              </a:rPr>
-              <a:t>void</a:t>
-            </a:r>
-            <a:r>
-              <a:rPr lang="en-US" sz="2400" b="0" u="none" strike="noStrike">
-                <a:solidFill>
-                  <a:srgbClr val="000000"/>
-                </a:solidFill>
-                <a:effectLst/>
-                <a:uFillTx/>
-                <a:latin typeface="Consolas"/>
-              </a:rPr>
-              <a:t> foo (</a:t>
-            </a:r>
-            <a:r>
-              <a:rPr lang="en-US" sz="2400" b="0" u="none" strike="noStrike">
-                <a:solidFill>
-                  <a:srgbClr val="0000FF"/>
-                </a:solidFill>
-                <a:effectLst/>
-                <a:uFillTx/>
-                <a:latin typeface="Consolas"/>
-              </a:rPr>
-              <a:t>const</a:t>
-            </a:r>
-            <a:r>
-              <a:rPr lang="en-US" sz="2400" b="0" u="none" strike="noStrike">
-                <a:solidFill>
-                  <a:srgbClr val="000000"/>
-                </a:solidFill>
-                <a:effectLst/>
-                <a:uFillTx/>
-                <a:latin typeface="Consolas"/>
-              </a:rPr>
-              <a:t> </a:t>
-            </a:r>
-            <a:r>
-              <a:rPr lang="en-US" sz="2400" b="0" u="none" strike="noStrike">
-                <a:solidFill>
-                  <a:srgbClr val="0000FF"/>
-                </a:solidFill>
-                <a:effectLst/>
-                <a:uFillTx/>
-                <a:latin typeface="Consolas"/>
-              </a:rPr>
-              <a:t>int</a:t>
-            </a:r>
-            <a:r>
-              <a:rPr lang="en-US" sz="2400" b="0" u="none" strike="noStrike">
-                <a:solidFill>
-                  <a:srgbClr val="000000"/>
-                </a:solidFill>
-                <a:effectLst/>
-                <a:uFillTx/>
-                <a:latin typeface="Consolas"/>
-              </a:rPr>
-              <a:t> &amp;a) </a:t>
-            </a:r>
-            <a:br>
-              <a:rPr sz="2400"/>
-            </a:br>
-            <a:r>
-              <a:rPr lang="en-US" sz="2400" b="0" u="none" strike="noStrike">
-                <a:solidFill>
-                  <a:srgbClr val="000000"/>
-                </a:solidFill>
-                <a:effectLst/>
-                <a:uFillTx/>
-                <a:latin typeface="Consolas"/>
-              </a:rPr>
-              <a:t>{ </a:t>
-            </a:r>
-            <a:br>
-              <a:rPr sz="2400"/>
-            </a:br>
-            <a:r>
-              <a:rPr lang="en-US" sz="2400" b="0" u="none" strike="noStrike">
-                <a:solidFill>
-                  <a:srgbClr val="000000"/>
-                </a:solidFill>
-                <a:effectLst/>
-                <a:uFillTx/>
-                <a:latin typeface="Consolas"/>
-              </a:rPr>
-              <a:t>   ... </a:t>
-            </a:r>
-            <a:br>
-              <a:rPr sz="2400"/>
-            </a:br>
-            <a:r>
-              <a:rPr lang="en-US" sz="2400" b="0" u="none" strike="noStrike">
-                <a:solidFill>
-                  <a:srgbClr val="000000"/>
-                </a:solidFill>
-                <a:effectLst/>
-                <a:uFillTx/>
-                <a:latin typeface="Consolas"/>
-              </a:rPr>
-              <a:t>} </a:t>
-            </a:r>
-            <a:endParaRPr lang="en-US" sz="2400" b="0" u="none" strike="noStrike">
-              <a:solidFill>
-                <a:srgbClr val="FFFFFF"/>
-              </a:solidFill>
-              <a:effectLst/>
-              <a:uFillTx/>
-              <a:latin typeface="Arial"/>
-            </a:endParaRPr>
-          </a:p>
-        </p:txBody>
-      </p:sp>
-      <p:sp>
-        <p:nvSpPr>
-          <p:cNvPr id="64" name="Line 5"/>
-          <p:cNvSpPr/>
-          <p:nvPr/>
-        </p:nvSpPr>
-        <p:spPr>
-          <a:xfrm>
-            <a:off x="4381200" y="1143000"/>
-            <a:ext cx="360" cy="2666880"/>
-          </a:xfrm>
-          <a:prstGeom prst="line">
-            <a:avLst/>
-          </a:prstGeom>
-          <a:ln w="12600">
-            <a:solidFill>
-              <a:srgbClr val="000000"/>
-            </a:solidFill>
-            <a:round/>
-          </a:ln>
-        </p:spPr>
-        <p:style>
-          <a:lnRef idx="0">
-            <a:scrgbClr r="0" g="0" b="0"/>
-          </a:lnRef>
-          <a:fillRef idx="0">
-            <a:scrgbClr r="0" g="0" b="0"/>
-          </a:fillRef>
-          <a:effectRef idx="0">
-            <a:scrgbClr r="0" g="0" b="0"/>
-          </a:effectRef>
-          <a:fontRef idx="minor"/>
-        </p:style>
-        <p:txBody>
-          <a:bodyPr lIns="182880" tIns="137160" rIns="182880" bIns="137160" anchor="ctr" anchorCtr="1">
-            <a:noAutofit/>
-          </a:bodyPr>
-          <a:lstStyle/>
-          <a:p>
-            <a:endParaRPr lang="en-US" sz="2400" b="0" u="none" strike="noStrike">
-              <a:solidFill>
-                <a:srgbClr val="FFFFFF"/>
-              </a:solidFill>
-              <a:effectLst/>
-              <a:uFillTx/>
-              <a:latin typeface="Arial"/>
-            </a:endParaRPr>
-          </a:p>
-        </p:txBody>
-      </p:sp>
-      <p:sp>
-        <p:nvSpPr>
-          <p:cNvPr id="65" name="Rectangle 7"/>
-          <p:cNvSpPr/>
-          <p:nvPr/>
-        </p:nvSpPr>
-        <p:spPr>
-          <a:xfrm>
-            <a:off x="449280" y="5226120"/>
-            <a:ext cx="8123040" cy="1399680"/>
-          </a:xfrm>
-          <a:prstGeom prst="rect">
-            <a:avLst/>
-          </a:prstGeom>
-          <a:blipFill rotWithShape="0">
-            <a:blip r:embed="rId2"/>
-            <a:srcRect/>
-            <a:tile tx="0" ty="0" sx="69982" sy="68571" algn="ctr"/>
-          </a:blipFill>
-          <a:ln w="9360">
-            <a:solidFill>
-              <a:srgbClr val="000000"/>
-            </a:solidFill>
-            <a:round/>
-          </a:ln>
-          <a:effectLst>
-            <a:outerShdw dist="25560" dir="5400000" rotWithShape="0">
-              <a:srgbClr val="000000">
-                <a:alpha val="50000"/>
-              </a:srgbClr>
-            </a:outerShdw>
-          </a:effectLst>
-        </p:spPr>
-        <p:style>
-          <a:lnRef idx="0">
-            <a:scrgbClr r="0" g="0" b="0"/>
-          </a:lnRef>
-          <a:fillRef idx="0">
-            <a:scrgbClr r="0" g="0" b="0"/>
-          </a:fillRef>
-          <a:effectRef idx="0">
-            <a:scrgbClr r="0" g="0" b="0"/>
-          </a:effectRef>
-          <a:fontRef idx="minor"/>
-        </p:style>
-        <p:txBody>
-          <a:bodyPr lIns="90360" tIns="44280" rIns="90360" bIns="44280" anchor="t">
-            <a:noAutofit/>
-          </a:bodyPr>
-          <a:lstStyle/>
-          <a:p>
-            <a:pPr marL="285840" indent="-285480">
-              <a:lnSpc>
-                <a:spcPct val="90000"/>
-              </a:lnSpc>
-              <a:buClr>
-                <a:srgbClr val="000000"/>
-              </a:buClr>
-              <a:buFont typeface="Symbol" charset="2"/>
-              <a:buChar char=""/>
-            </a:pPr>
-            <a:r>
-              <a:rPr lang="en-US" sz="2800" b="0" u="none" strike="noStrike">
-                <a:solidFill>
-                  <a:srgbClr val="000000"/>
-                </a:solidFill>
-                <a:effectLst/>
-                <a:uFillTx/>
-                <a:latin typeface="Arial"/>
-              </a:rPr>
-              <a:t>Avoid copying objects</a:t>
-            </a:r>
-            <a:br>
-              <a:rPr sz="2800"/>
-            </a:br>
-            <a:r>
-              <a:rPr lang="en-US" sz="2800" b="0" u="none" strike="noStrike">
-                <a:solidFill>
-                  <a:srgbClr val="000000"/>
-                </a:solidFill>
-                <a:effectLst/>
-                <a:uFillTx/>
-                <a:latin typeface="Arial"/>
-              </a:rPr>
-              <a:t>     without allowing changes in their value.</a:t>
-            </a:r>
-          </a:p>
-        </p:txBody>
-      </p:sp>
-    </p:spTree>
+    <p:extLst>
+      <p:ext uri="{BB962C8B-B14F-4D97-AF65-F5344CB8AC3E}">
+        <p14:creationId xmlns:p14="http://schemas.microsoft.com/office/powerpoint/2010/main" val="2612817541"/>
+      </p:ext>
+    </p:extLst>
   </p:cSld>
   <p:clrMapOvr>
     <a:masterClrMapping/>
